--- a/weekly-report/demo/w40/out/output/P-ASM-001_2026-W40.pptx
+++ b/weekly-report/demo/w40/out/output/P-ASM-001_2026-W40.pptx
@@ -12,7 +12,6 @@
   </p:handoutMasterIdLst>
   <p:sldIdLst>
     <p:sldId id="2147482079" r:id="rId5"/>
-    <p:sldId id="2147482080" r:id="rId14"/>
   </p:sldIdLst>
   <p:sldSz cx="9906000" cy="6858000" type="A4"/>
   <p:notesSz cx="6735763" cy="9866313"/>
@@ -5085,7 +5084,7 @@
         <p:spPr>
           <a:xfrm>
             <a:off x="1670334" y="1284290"/>
-            <a:ext cx="6970747" cy="411480"/>
+            <a:ext cx="6970747" cy="401193"/>
           </a:xfrm>
           <a:prstGeom prst="rect">
             <a:avLst/>
@@ -5170,7 +5169,7 @@
           </p:nvPr>
         </p:nvGraphicFramePr>
         <p:xfrm>
-          <a:off x="1670334" y="1750634"/>
+          <a:off x="1670334" y="1712915"/>
           <a:ext cx="6970743" cy="1874520"/>
         </p:xfrm>
         <a:graphic>
@@ -9512,8 +9511,8 @@
         </p:nvSpPr>
         <p:spPr>
           <a:xfrm>
-            <a:off x="1670334" y="3680018"/>
-            <a:ext cx="6970747" cy="2821366"/>
+            <a:off x="1670334" y="3614867"/>
+            <a:ext cx="6970747" cy="2886517"/>
           </a:xfrm>
           <a:prstGeom prst="rect">
             <a:avLst/>
@@ -9574,7 +9573,7 @@
                 <a:ea typeface="LG스마트체 Regular" panose="020B0600000101010101" pitchFamily="50" charset="-127"/>
                 <a:cs typeface="Arial Narrow"/>
               </a:rPr>
-              <a:t>- 1차 로직(8/13): EPC 미보정·보정량 부족 개선, 이음매 예측 보정 세분화(2→3회)</a:t>
+              <a:t>- 1차 로직(8/13) 적용: E77 0.189% → 0.164%, 18대 중 12대 감소</a:t>
             </a:r>
             <a:endParaRPr lang="ko-KR" sz="900" dirty="0">
               <a:ea typeface="LG스마트체 Regular" panose="020B0600000101010101" pitchFamily="50" charset="-127"/>
@@ -9602,7 +9601,7 @@
                 <a:ea typeface="LG스마트체 Regular" panose="020B0600000101010101" pitchFamily="50" charset="-127"/>
                 <a:cs typeface="Arial Narrow"/>
               </a:rPr>
-              <a:t>- 1차 적용 결과 E77 18대 중 12대 감소, 6대 증가(#13-1·2 등)</a:t>
+              <a:t>- 2차 로직(9/4~): Limit ±0.35mm, 대표 4대 0.270% → 0.185%</a:t>
             </a:r>
             <a:endParaRPr lang="ko-KR" sz="900" dirty="0">
               <a:ea typeface="LG스마트체 Regular" panose="020B0600000101010101" pitchFamily="50" charset="-127"/>
@@ -9630,7 +9629,7 @@
                 <a:ea typeface="LG스마트체 Regular" panose="020B0600000101010101" pitchFamily="50" charset="-127"/>
                 <a:cs typeface="Arial Narrow"/>
               </a:rPr>
-              <a:t>- 2차 로직(9/4~): 예측 보정 Limit ±0.35mm, 이음매 이후 즉시 Feedback</a:t>
+              <a:t>- 수평전개 완료: MEB·ESMI1 #2-2·3(9/16), Normal Line(9/30), 누적 26대</a:t>
             </a:r>
             <a:endParaRPr lang="ko-KR" sz="900" dirty="0">
               <a:ea typeface="LG스마트체 Regular" panose="020B0600000101010101" pitchFamily="50" charset="-127"/>
@@ -9658,119 +9657,7 @@
                 <a:ea typeface="LG스마트체 Regular" panose="020B0600000101010101" pitchFamily="50" charset="-127"/>
                 <a:cs typeface="Arial Narrow"/>
               </a:rPr>
-              <a:t>- 2차 대표 4대 0.270% → 0.185%, 결과 법인 공유(9/15)</a:t>
-            </a:r>
-            <a:endParaRPr lang="ko-KR" sz="900" dirty="0">
-              <a:ea typeface="LG스마트체 Regular" panose="020B0600000101010101" pitchFamily="50" charset="-127"/>
-              <a:cs typeface="Arial Narrow"/>
-            </a:endParaRPr>
-          </a:p>
-          <a:p>
-            <a:pPr>
-              <a:lnSpc>
-                <a:spcPct val="100000"/>
-              </a:lnSpc>
-              <a:spcBef>
-                <a:spcPts val="0"/>
-              </a:spcBef>
-              <a:spcAft>
-                <a:spcPts val="0"/>
-              </a:spcAft>
-            </a:pPr>
-            <a:r>
-              <a:rPr sz="900" b="0">
-                <a:solidFill>
-                  <a:srgbClr val="000000"/>
-                </a:solidFill>
-                <a:latin typeface="Arial Narrow"/>
-                <a:ea typeface="LG스마트체 Regular" panose="020B0600000101010101" pitchFamily="50" charset="-127"/>
-                <a:cs typeface="Arial Narrow"/>
-              </a:rPr>
-              <a:t>- MEB 전 라인·ESMI1 #2-2·3 수평전개 완료(9/16)</a:t>
-            </a:r>
-            <a:endParaRPr lang="ko-KR" sz="900" dirty="0">
-              <a:ea typeface="LG스마트체 Regular" panose="020B0600000101010101" pitchFamily="50" charset="-127"/>
-              <a:cs typeface="Arial Narrow"/>
-            </a:endParaRPr>
-          </a:p>
-          <a:p>
-            <a:pPr>
-              <a:lnSpc>
-                <a:spcPct val="100000"/>
-              </a:lnSpc>
-              <a:spcBef>
-                <a:spcPts val="0"/>
-              </a:spcBef>
-              <a:spcAft>
-                <a:spcPts val="0"/>
-              </a:spcAft>
-            </a:pPr>
-            <a:r>
-              <a:rPr sz="900" b="0">
-                <a:solidFill>
-                  <a:srgbClr val="000000"/>
-                </a:solidFill>
-                <a:latin typeface="Arial Narrow"/>
-                <a:ea typeface="LG스마트체 Regular" panose="020B0600000101010101" pitchFamily="50" charset="-127"/>
-                <a:cs typeface="Arial Narrow"/>
-              </a:rPr>
-              <a:t>- ESWA 0.171% → 0.144%(4일) → 0.139%(2주), ESMI1 0.367% → 0.221%(2주)</a:t>
-            </a:r>
-            <a:endParaRPr lang="ko-KR" sz="900" dirty="0">
-              <a:ea typeface="LG스마트체 Regular" panose="020B0600000101010101" pitchFamily="50" charset="-127"/>
-              <a:cs typeface="Arial Narrow"/>
-            </a:endParaRPr>
-          </a:p>
-          <a:p>
-            <a:pPr>
-              <a:lnSpc>
-                <a:spcPct val="100000"/>
-              </a:lnSpc>
-              <a:spcBef>
-                <a:spcPts val="0"/>
-              </a:spcBef>
-              <a:spcAft>
-                <a:spcPts val="0"/>
-              </a:spcAft>
-            </a:pPr>
-            <a:r>
-              <a:rPr sz="900" b="0">
-                <a:solidFill>
-                  <a:srgbClr val="000000"/>
-                </a:solidFill>
-                <a:latin typeface="Arial Narrow"/>
-                <a:ea typeface="LG스마트체 Regular" panose="020B0600000101010101" pitchFamily="50" charset="-127"/>
-                <a:cs typeface="Arial Narrow"/>
-              </a:rPr>
-              <a:t>- Normal Line 수평전개 완료(9/30), 누적 적용 호기 26대</a:t>
-            </a:r>
-            <a:endParaRPr lang="ko-KR" sz="900" dirty="0">
-              <a:ea typeface="LG스마트체 Regular" panose="020B0600000101010101" pitchFamily="50" charset="-127"/>
-              <a:cs typeface="Arial Narrow"/>
-            </a:endParaRPr>
-          </a:p>
-          <a:p>
-            <a:pPr>
-              <a:lnSpc>
-                <a:spcPct val="100000"/>
-              </a:lnSpc>
-              <a:spcBef>
-                <a:spcPts val="0"/>
-              </a:spcBef>
-              <a:spcAft>
-                <a:spcPts val="0"/>
-              </a:spcAft>
-            </a:pPr>
-            <a:r>
-              <a:rPr sz="900" b="0">
-                <a:solidFill>
-                  <a:srgbClr val="000000"/>
-                </a:solidFill>
-                <a:latin typeface="Arial Narrow"/>
-                <a:ea typeface="LG스마트체 Regular" panose="020B0600000101010101" pitchFamily="50" charset="-127"/>
-                <a:cs typeface="Arial Narrow"/>
-              </a:rPr>
-              <a:t>- 1차 적용 E77 위치 불량률 0.189% → 0.164%</a:t>
+              <a:t>- ESWA 0.171% → 0.144%(4일) → 0.139%(2주), ESMI1 0.367% → 0.221%</a:t>
             </a:r>
             <a:endParaRPr lang="ko-KR" sz="900" dirty="0">
               <a:ea typeface="LG스마트체 Regular" panose="020B0600000101010101" pitchFamily="50" charset="-127"/>
@@ -10063,1907 +9950,6 @@
               <a:cs typeface="Arial Narrow"/>
             </a:endParaRPr>
           </a:p>
-        </p:txBody>
-      </p:sp>
-    </p:spTree>
-    <p:extLst>
-      <p:ext uri="{BB962C8B-B14F-4D97-AF65-F5344CB8AC3E}">
-        <p14:creationId xmlns:p14="http://schemas.microsoft.com/office/powerpoint/2010/main" val="4080837860"/>
-      </p:ext>
-    </p:extLst>
-  </p:cSld>
-  <p:clrMapOvr>
-    <a:masterClrMapping/>
-  </p:clrMapOvr>
-</p:sld>
-</file>
-
-<file path=ppt/slides/slide2.xml><?xml version="1.0" encoding="utf-8"?>
-<p:sld xmlns:a="http://schemas.openxmlformats.org/drawingml/2006/main" xmlns:p="http://schemas.openxmlformats.org/presentationml/2006/main" xmlns:r="http://schemas.openxmlformats.org/officeDocument/2006/relationships">
-  <p:cSld>
-    <p:spTree>
-      <p:nvGrpSpPr>
-        <p:cNvPr id="1" name=""/>
-        <p:cNvGrpSpPr/>
-        <p:nvPr/>
-      </p:nvGrpSpPr>
-      <p:grpSpPr/>
-      <p:graphicFrame>
-        <p:nvGraphicFramePr>
-          <p:cNvPr id="3" name="main_table">
-            <a:extLst>
-              <a:ext uri="{FF2B5EF4-FFF2-40B4-BE49-F238E27FC236}">
-                <a16:creationId xmlns:a16="http://schemas.microsoft.com/office/drawing/2014/main" id="{3E86696F-E35A-4B06-9B46-63A4A6A986C1}"/>
-              </a:ext>
-            </a:extLst>
-          </p:cNvPr>
-          <p:cNvGraphicFramePr>
-            <a:graphicFrameLocks noGrp="1"/>
-          </p:cNvGraphicFramePr>
-          <p:nvPr>
-            <p:extLst>
-              <p:ext uri="{D42A27DB-BD31-4B8C-83A1-F6EECF244321}">
-                <p14:modId xmlns:p14="http://schemas.microsoft.com/office/powerpoint/2010/main" val="109992296"/>
-              </p:ext>
-            </p:extLst>
-          </p:nvPr>
-        </p:nvGraphicFramePr>
-        <p:xfrm>
-          <a:off x="125047" y="866775"/>
-          <a:ext cx="9644176" cy="5708566"/>
-        </p:xfrm>
-        <a:graphic>
-          <a:graphicData uri="http://schemas.openxmlformats.org/drawingml/2006/table">
-            <a:tbl>
-              <a:tblPr/>
-              <a:tblGrid>
-                <a:gridCol w="823220">
-                  <a:extLst>
-                    <a:ext uri="{9D8B030D-6E8A-4147-A177-3AD203B41FA5}">
-                      <a16:colId xmlns:a16="http://schemas.microsoft.com/office/drawing/2014/main" val="20000"/>
-                    </a:ext>
-                  </a:extLst>
-                </a:gridCol>
-                <a:gridCol w="676347">
-                  <a:extLst>
-                    <a:ext uri="{9D8B030D-6E8A-4147-A177-3AD203B41FA5}">
-                      <a16:colId xmlns:a16="http://schemas.microsoft.com/office/drawing/2014/main" val="20001"/>
-                    </a:ext>
-                  </a:extLst>
-                </a:gridCol>
-                <a:gridCol w="7062187">
-                  <a:extLst>
-                    <a:ext uri="{9D8B030D-6E8A-4147-A177-3AD203B41FA5}">
-                      <a16:colId xmlns:a16="http://schemas.microsoft.com/office/drawing/2014/main" val="20002"/>
-                    </a:ext>
-                  </a:extLst>
-                </a:gridCol>
-                <a:gridCol w="557867">
-                  <a:extLst>
-                    <a:ext uri="{9D8B030D-6E8A-4147-A177-3AD203B41FA5}">
-                      <a16:colId xmlns:a16="http://schemas.microsoft.com/office/drawing/2014/main" val="20004"/>
-                    </a:ext>
-                  </a:extLst>
-                </a:gridCol>
-                <a:gridCol w="524555">
-                  <a:extLst>
-                    <a:ext uri="{9D8B030D-6E8A-4147-A177-3AD203B41FA5}">
-                      <a16:colId xmlns:a16="http://schemas.microsoft.com/office/drawing/2014/main" val="20005"/>
-                    </a:ext>
-                  </a:extLst>
-                </a:gridCol>
-              </a:tblGrid>
-              <a:tr h="178680">
-                <a:tc>
-                  <a:txBody>
-                    <a:bodyPr/>
-                    <a:lstStyle/>
-                    <a:p>
-                      <a:pPr algn="ctr" fontAlgn="ctr"/>
-                      <a:r>
-                        <a:rPr lang="ko-KR" altLang="en-US" sz="900" b="1" i="0" u="none" strike="noStrike" dirty="0">
-                          <a:solidFill>
-                            <a:srgbClr val="FFFFFF"/>
-                          </a:solidFill>
-                          <a:effectLst/>
-                          <a:latin typeface="+mn-lt"/>
-                          <a:ea typeface="LG스마트체 Regular" panose="020B0600000101010101" pitchFamily="50" charset="-127"/>
-                          <a:cs typeface="Arial Narrow"/>
-                        </a:rPr>
-                        <a:t>과제명</a:t>
-                      </a:r>
-                    </a:p>
-                  </a:txBody>
-                  <a:tcPr marL="6273" marR="6273" marT="36000" marB="36000" anchor="ctr">
-                    <a:lnL>
-                      <a:noFill/>
-                    </a:lnL>
-                    <a:lnR w="12700" cap="flat" cmpd="sng" algn="ctr">
-                      <a:solidFill>
-                        <a:schemeClr val="tx1"/>
-                      </a:solidFill>
-                      <a:prstDash val="solid"/>
-                      <a:round/>
-                      <a:headEnd type="none" w="med" len="med"/>
-                      <a:tailEnd type="none" w="med" len="med"/>
-                    </a:lnR>
-                    <a:lnT w="6350" cap="flat" cmpd="sng" algn="ctr">
-                      <a:solidFill>
-                        <a:srgbClr val="000000"/>
-                      </a:solidFill>
-                      <a:prstDash val="solid"/>
-                      <a:round/>
-                      <a:headEnd type="none" w="med" len="med"/>
-                      <a:tailEnd type="none" w="med" len="med"/>
-                    </a:lnT>
-                    <a:lnB w="12700" cap="flat" cmpd="sng" algn="ctr">
-                      <a:solidFill>
-                        <a:schemeClr val="tx1"/>
-                      </a:solidFill>
-                      <a:prstDash val="solid"/>
-                      <a:round/>
-                      <a:headEnd type="none" w="med" len="med"/>
-                      <a:tailEnd type="none" w="med" len="med"/>
-                    </a:lnB>
-                    <a:solidFill>
-                      <a:schemeClr val="tx1"/>
-                    </a:solidFill>
-                  </a:tcPr>
-                </a:tc>
-                <a:tc>
-                  <a:txBody>
-                    <a:bodyPr/>
-                    <a:lstStyle/>
-                    <a:p>
-                      <a:pPr algn="ctr" fontAlgn="ctr"/>
-                      <a:r>
-                        <a:rPr lang="ko-KR" altLang="en-US" sz="900" b="1" i="0" u="none" strike="noStrike">
-                          <a:solidFill>
-                            <a:srgbClr val="FFFFFF"/>
-                          </a:solidFill>
-                          <a:effectLst/>
-                          <a:latin typeface="+mn-lt"/>
-                          <a:ea typeface="LG스마트체 Regular" panose="020B0600000101010101" pitchFamily="50" charset="-127"/>
-                          <a:cs typeface="Arial Narrow"/>
-                        </a:rPr>
-                        <a:t>대상</a:t>
-                      </a:r>
-                    </a:p>
-                  </a:txBody>
-                  <a:tcPr marL="6273" marR="6273" marT="36000" marB="36000" anchor="ctr">
-                    <a:lnL w="12700" cap="flat" cmpd="sng" algn="ctr">
-                      <a:solidFill>
-                        <a:schemeClr val="tx1"/>
-                      </a:solidFill>
-                      <a:prstDash val="solid"/>
-                      <a:round/>
-                      <a:headEnd type="none" w="med" len="med"/>
-                      <a:tailEnd type="none" w="med" len="med"/>
-                    </a:lnL>
-                    <a:lnR w="12700" cap="flat" cmpd="sng" algn="ctr">
-                      <a:solidFill>
-                        <a:schemeClr val="tx1"/>
-                      </a:solidFill>
-                      <a:prstDash val="solid"/>
-                      <a:round/>
-                      <a:headEnd type="none" w="med" len="med"/>
-                      <a:tailEnd type="none" w="med" len="med"/>
-                    </a:lnR>
-                    <a:lnT w="6350" cap="flat" cmpd="sng" algn="ctr">
-                      <a:solidFill>
-                        <a:srgbClr val="000000"/>
-                      </a:solidFill>
-                      <a:prstDash val="solid"/>
-                      <a:round/>
-                      <a:headEnd type="none" w="med" len="med"/>
-                      <a:tailEnd type="none" w="med" len="med"/>
-                    </a:lnT>
-                    <a:lnB w="12700" cap="flat" cmpd="sng" algn="ctr">
-                      <a:solidFill>
-                        <a:schemeClr val="tx1"/>
-                      </a:solidFill>
-                      <a:prstDash val="solid"/>
-                      <a:round/>
-                      <a:headEnd type="none" w="med" len="med"/>
-                      <a:tailEnd type="none" w="med" len="med"/>
-                    </a:lnB>
-                    <a:solidFill>
-                      <a:schemeClr val="tx1"/>
-                    </a:solidFill>
-                  </a:tcPr>
-                </a:tc>
-                <a:tc>
-                  <a:txBody>
-                    <a:bodyPr/>
-                    <a:lstStyle/>
-                    <a:p>
-                      <a:pPr lvl="0" algn="ctr">
-                        <a:lnSpc>
-                          <a:spcPct val="100000"/>
-                        </a:lnSpc>
-                        <a:spcBef>
-                          <a:spcPts val="0"/>
-                        </a:spcBef>
-                        <a:spcAft>
-                          <a:spcPts val="0"/>
-                        </a:spcAft>
-                        <a:buNone/>
-                      </a:pPr>
-                      <a:r>
-                        <a:rPr sz="900" b="0">
-                          <a:solidFill>
-                            <a:srgbClr val="FFFFFF"/>
-                          </a:solidFill>
-                          <a:latin typeface="Arial Narrow"/>
-                          <a:ea typeface="LG스마트체 Regular" panose="020B0600000101010101" pitchFamily="50" charset="-127"/>
-                          <a:cs typeface="Arial Narrow"/>
-                        </a:rPr>
-                        <a:t>금주 진행사항 (W40)  (9/28~10/4)</a:t>
-                      </a:r>
-                      <a:endParaRPr lang="ko-KR" sz="900">
-                        <a:latin typeface="+mn-lt"/>
-                        <a:ea typeface="LG스마트체 Regular" panose="020B0600000101010101" pitchFamily="50" charset="-127"/>
-                        <a:cs typeface="Arial Narrow"/>
-                      </a:endParaRPr>
-                    </a:p>
-                  </a:txBody>
-                  <a:tcPr marL="6273" marR="6273" marT="36000" marB="36000" anchor="ctr">
-                    <a:lnL w="12700" cap="flat" cmpd="sng" algn="ctr">
-                      <a:solidFill>
-                        <a:schemeClr val="tx1"/>
-                      </a:solidFill>
-                      <a:prstDash val="solid"/>
-                      <a:round/>
-                      <a:headEnd type="none" w="med" len="med"/>
-                      <a:tailEnd type="none" w="med" len="med"/>
-                    </a:lnL>
-                    <a:lnR w="12700" cap="flat" cmpd="sng" algn="ctr">
-                      <a:solidFill>
-                        <a:schemeClr val="tx1"/>
-                      </a:solidFill>
-                      <a:prstDash val="solid"/>
-                      <a:round/>
-                      <a:headEnd type="none" w="med" len="med"/>
-                      <a:tailEnd type="none" w="med" len="med"/>
-                    </a:lnR>
-                    <a:lnT w="6350" cap="flat" cmpd="sng" algn="ctr">
-                      <a:solidFill>
-                        <a:srgbClr val="000000"/>
-                      </a:solidFill>
-                      <a:prstDash val="solid"/>
-                      <a:round/>
-                      <a:headEnd type="none" w="med" len="med"/>
-                      <a:tailEnd type="none" w="med" len="med"/>
-                    </a:lnT>
-                    <a:lnB w="12700" cap="flat" cmpd="sng" algn="ctr">
-                      <a:solidFill>
-                        <a:schemeClr val="tx1"/>
-                      </a:solidFill>
-                      <a:prstDash val="solid"/>
-                      <a:round/>
-                      <a:headEnd type="none" w="med" len="med"/>
-                      <a:tailEnd type="none" w="med" len="med"/>
-                    </a:lnB>
-                    <a:solidFill>
-                      <a:schemeClr val="tx1"/>
-                    </a:solidFill>
-                  </a:tcPr>
-                </a:tc>
-                <a:tc>
-                  <a:txBody>
-                    <a:bodyPr/>
-                    <a:lstStyle/>
-                    <a:p>
-                      <a:pPr algn="ctr" fontAlgn="ctr"/>
-                      <a:r>
-                        <a:rPr lang="ko-KR" altLang="en-US" sz="900" b="1" i="0" u="none" strike="noStrike">
-                          <a:solidFill>
-                            <a:srgbClr val="FFFFFF"/>
-                          </a:solidFill>
-                          <a:effectLst/>
-                          <a:latin typeface="+mn-lt"/>
-                          <a:ea typeface="LG스마트체 Regular" panose="020B0600000101010101" pitchFamily="50" charset="-127"/>
-                          <a:cs typeface="Arial Narrow"/>
-                        </a:rPr>
-                        <a:t>일정</a:t>
-                      </a:r>
-                    </a:p>
-                  </a:txBody>
-                  <a:tcPr marL="6273" marR="6273" marT="36000" marB="36000" anchor="ctr">
-                    <a:lnL w="12700" cap="flat" cmpd="sng" algn="ctr">
-                      <a:solidFill>
-                        <a:schemeClr val="tx1"/>
-                      </a:solidFill>
-                      <a:prstDash val="solid"/>
-                      <a:round/>
-                      <a:headEnd type="none" w="med" len="med"/>
-                      <a:tailEnd type="none" w="med" len="med"/>
-                    </a:lnL>
-                    <a:lnR w="12700" cap="flat" cmpd="sng" algn="ctr">
-                      <a:solidFill>
-                        <a:schemeClr val="tx1"/>
-                      </a:solidFill>
-                      <a:prstDash val="solid"/>
-                      <a:round/>
-                      <a:headEnd type="none" w="med" len="med"/>
-                      <a:tailEnd type="none" w="med" len="med"/>
-                    </a:lnR>
-                    <a:lnT w="6350" cap="flat" cmpd="sng" algn="ctr">
-                      <a:solidFill>
-                        <a:srgbClr val="000000"/>
-                      </a:solidFill>
-                      <a:prstDash val="solid"/>
-                      <a:round/>
-                      <a:headEnd type="none" w="med" len="med"/>
-                      <a:tailEnd type="none" w="med" len="med"/>
-                    </a:lnT>
-                    <a:lnB w="12700" cap="flat" cmpd="sng" algn="ctr">
-                      <a:solidFill>
-                        <a:schemeClr val="tx1"/>
-                      </a:solidFill>
-                      <a:prstDash val="solid"/>
-                      <a:round/>
-                      <a:headEnd type="none" w="med" len="med"/>
-                      <a:tailEnd type="none" w="med" len="med"/>
-                    </a:lnB>
-                    <a:solidFill>
-                      <a:schemeClr val="tx1"/>
-                    </a:solidFill>
-                  </a:tcPr>
-                </a:tc>
-                <a:tc>
-                  <a:txBody>
-                    <a:bodyPr/>
-                    <a:lstStyle/>
-                    <a:p>
-                      <a:pPr algn="ctr" fontAlgn="ctr"/>
-                      <a:r>
-                        <a:rPr lang="ko-KR" altLang="en-US" sz="900" b="1" i="0" u="none" strike="noStrike">
-                          <a:solidFill>
-                            <a:srgbClr val="FFFFFF"/>
-                          </a:solidFill>
-                          <a:effectLst/>
-                          <a:latin typeface="+mn-lt"/>
-                          <a:ea typeface="LG스마트체 Regular" panose="020B0600000101010101" pitchFamily="50" charset="-127"/>
-                          <a:cs typeface="Arial Narrow"/>
-                        </a:rPr>
-                        <a:t>담당자</a:t>
-                      </a:r>
-                    </a:p>
-                  </a:txBody>
-                  <a:tcPr marL="6273" marR="6273" marT="36000" marB="36000" anchor="ctr">
-                    <a:lnL w="12700" cap="flat" cmpd="sng" algn="ctr">
-                      <a:solidFill>
-                        <a:schemeClr val="tx1"/>
-                      </a:solidFill>
-                      <a:prstDash val="solid"/>
-                      <a:round/>
-                      <a:headEnd type="none" w="med" len="med"/>
-                      <a:tailEnd type="none" w="med" len="med"/>
-                    </a:lnL>
-                    <a:lnR>
-                      <a:noFill/>
-                    </a:lnR>
-                    <a:lnT w="6350" cap="flat" cmpd="sng" algn="ctr">
-                      <a:solidFill>
-                        <a:srgbClr val="000000"/>
-                      </a:solidFill>
-                      <a:prstDash val="solid"/>
-                      <a:round/>
-                      <a:headEnd type="none" w="med" len="med"/>
-                      <a:tailEnd type="none" w="med" len="med"/>
-                    </a:lnT>
-                    <a:lnB w="12700" cap="flat" cmpd="sng" algn="ctr">
-                      <a:solidFill>
-                        <a:schemeClr val="tx1"/>
-                      </a:solidFill>
-                      <a:prstDash val="solid"/>
-                      <a:round/>
-                      <a:headEnd type="none" w="med" len="med"/>
-                      <a:tailEnd type="none" w="med" len="med"/>
-                    </a:lnB>
-                    <a:solidFill>
-                      <a:schemeClr val="tx1"/>
-                    </a:solidFill>
-                  </a:tcPr>
-                </a:tc>
-                <a:extLst>
-                  <a:ext uri="{0D108BD9-81ED-4DB2-BD59-A6C34878D82A}">
-                    <a16:rowId xmlns:a16="http://schemas.microsoft.com/office/drawing/2014/main" val="10000"/>
-                  </a:ext>
-                </a:extLst>
-              </a:tr>
-              <a:tr h="202259">
-                <a:tc rowSpan="2">
-                  <a:txBody>
-                    <a:bodyPr/>
-                    <a:lstStyle/>
-                    <a:p>
-                      <a:pPr lvl="0" algn="ctr">
-                        <a:lnSpc>
-                          <a:spcPct val="100000"/>
-                        </a:lnSpc>
-                        <a:spcBef>
-                          <a:spcPts val="0"/>
-                        </a:spcBef>
-                        <a:spcAft>
-                          <a:spcPts val="0"/>
-                        </a:spcAft>
-                        <a:buNone/>
-                      </a:pPr>
-                      <a:r>
-                        <a:rPr sz="900" b="0">
-                          <a:solidFill>
-                            <a:srgbClr val="000000"/>
-                          </a:solidFill>
-                          <a:latin typeface="Arial Narrow"/>
-                          <a:ea typeface="LG스마트체 Regular" panose="020B0600000101010101" pitchFamily="50" charset="-127"/>
-                          <a:cs typeface="Arial Narrow"/>
-                        </a:rPr>
-                        <a:t>ESWA 재료교체 불량 개선</a:t>
-                      </a:r>
-                      <a:endParaRPr lang="ko-KR" sz="900" dirty="0">
-                        <a:latin typeface="+mn-lt"/>
-                        <a:ea typeface="LG스마트체 Regular" panose="020B0600000101010101" pitchFamily="50" charset="-127"/>
-                        <a:cs typeface="Arial Narrow"/>
-                      </a:endParaRPr>
-                    </a:p>
-                  </a:txBody>
-                  <a:tcPr marL="36000" marR="6273" marT="6273" marB="0" anchor="ctr">
-                    <a:lnL>
-                      <a:noFill/>
-                    </a:lnL>
-                    <a:lnR w="12700" cap="flat" cmpd="sng" algn="ctr">
-                      <a:solidFill>
-                        <a:schemeClr val="bg1">
-                          <a:lumMod val="50000"/>
-                        </a:schemeClr>
-                      </a:solidFill>
-                      <a:prstDash val="solid"/>
-                      <a:round/>
-                      <a:headEnd type="none" w="med" len="med"/>
-                      <a:tailEnd type="none" w="med" len="med"/>
-                    </a:lnR>
-                    <a:lnT w="12700" cap="flat" cmpd="sng" algn="ctr">
-                      <a:solidFill>
-                        <a:schemeClr val="tx1"/>
-                      </a:solidFill>
-                      <a:prstDash val="solid"/>
-                      <a:round/>
-                      <a:headEnd type="none" w="med" len="med"/>
-                      <a:tailEnd type="none" w="med" len="med"/>
-                    </a:lnT>
-                    <a:lnB w="12700" cap="flat" cmpd="sng" algn="ctr">
-                      <a:solidFill>
-                        <a:schemeClr val="tx1"/>
-                      </a:solidFill>
-                      <a:prstDash val="solid"/>
-                      <a:round/>
-                      <a:headEnd type="none" w="med" len="med"/>
-                      <a:tailEnd type="none" w="med" len="med"/>
-                    </a:lnB>
-                  </a:tcPr>
-                </a:tc>
-                <a:tc rowSpan="2">
-                  <a:txBody>
-                    <a:bodyPr/>
-                    <a:lstStyle/>
-                    <a:p>
-                      <a:pPr lvl="0" algn="ctr">
-                        <a:lnSpc>
-                          <a:spcPct val="100000"/>
-                        </a:lnSpc>
-                        <a:spcBef>
-                          <a:spcPts val="0"/>
-                        </a:spcBef>
-                        <a:spcAft>
-                          <a:spcPts val="0"/>
-                        </a:spcAft>
-                        <a:buNone/>
-                      </a:pPr>
-                      <a:r>
-                        <a:rPr sz="900" b="0">
-                          <a:solidFill>
-                            <a:srgbClr val="000000"/>
-                          </a:solidFill>
-                          <a:latin typeface="Arial Narrow"/>
-                          <a:ea typeface="LG스마트체 Regular" panose="020B0600000101010101" pitchFamily="50" charset="-127"/>
-                          <a:cs typeface="Arial Narrow"/>
-                        </a:rPr>
-                        <a:t>WA MEB·조립</a:t>
-                      </a:r>
-                      <a:endParaRPr lang="ko-KR" sz="900">
-                        <a:latin typeface="+mn-lt"/>
-                        <a:ea typeface="LG스마트체 Regular" panose="020B0600000101010101" pitchFamily="50" charset="-127"/>
-                        <a:cs typeface="Arial Narrow"/>
-                      </a:endParaRPr>
-                    </a:p>
-                    <a:p>
-                      <a:pPr lvl="0" algn="ctr">
-                        <a:lnSpc>
-                          <a:spcPct val="100000"/>
-                        </a:lnSpc>
-                        <a:spcBef>
-                          <a:spcPts val="0"/>
-                        </a:spcBef>
-                        <a:spcAft>
-                          <a:spcPts val="0"/>
-                        </a:spcAft>
-                        <a:buNone/>
-                      </a:pPr>
-                      <a:r>
-                        <a:rPr sz="900" b="0">
-                          <a:solidFill>
-                            <a:srgbClr val="000000"/>
-                          </a:solidFill>
-                          <a:latin typeface="Arial Narrow"/>
-                          <a:ea typeface="LG스마트체 Regular" panose="020B0600000101010101" pitchFamily="50" charset="-127"/>
-                          <a:cs typeface="Arial Narrow"/>
-                        </a:rPr>
-                        <a:t>E77 18대</a:t>
-                      </a:r>
-                      <a:endParaRPr lang="ko-KR" sz="900">
-                        <a:latin typeface="+mn-lt"/>
-                        <a:ea typeface="LG스마트체 Regular" panose="020B0600000101010101" pitchFamily="50" charset="-127"/>
-                        <a:cs typeface="Arial Narrow"/>
-                      </a:endParaRPr>
-                    </a:p>
-                    <a:p>
-                      <a:pPr lvl="0" algn="ctr">
-                        <a:lnSpc>
-                          <a:spcPct val="100000"/>
-                        </a:lnSpc>
-                        <a:spcBef>
-                          <a:spcPts val="0"/>
-                        </a:spcBef>
-                        <a:spcAft>
-                          <a:spcPts val="0"/>
-                        </a:spcAft>
-                        <a:buNone/>
-                      </a:pPr>
-                      <a:r>
-                        <a:rPr sz="900" b="0">
-                          <a:solidFill>
-                            <a:srgbClr val="000000"/>
-                          </a:solidFill>
-                          <a:latin typeface="Arial Narrow"/>
-                          <a:ea typeface="LG스마트체 Regular" panose="020B0600000101010101" pitchFamily="50" charset="-127"/>
-                          <a:cs typeface="Arial Narrow"/>
-                        </a:rPr>
-                        <a:t>MI_HL·조립</a:t>
-                      </a:r>
-                      <a:endParaRPr lang="ko-KR" sz="900">
-                        <a:latin typeface="+mn-lt"/>
-                        <a:ea typeface="LG스마트체 Regular" panose="020B0600000101010101" pitchFamily="50" charset="-127"/>
-                        <a:cs typeface="Arial Narrow"/>
-                      </a:endParaRPr>
-                    </a:p>
-                    <a:p>
-                      <a:pPr lvl="0" algn="ctr">
-                        <a:lnSpc>
-                          <a:spcPct val="100000"/>
-                        </a:lnSpc>
-                        <a:spcBef>
-                          <a:spcPts val="0"/>
-                        </a:spcBef>
-                        <a:spcAft>
-                          <a:spcPts val="0"/>
-                        </a:spcAft>
-                        <a:buNone/>
-                      </a:pPr>
-                      <a:r>
-                        <a:rPr sz="900" b="0">
-                          <a:solidFill>
-                            <a:srgbClr val="000000"/>
-                          </a:solidFill>
-                          <a:latin typeface="Arial Narrow"/>
-                          <a:ea typeface="LG스마트체 Regular" panose="020B0600000101010101" pitchFamily="50" charset="-127"/>
-                          <a:cs typeface="Arial Narrow"/>
-                        </a:rPr>
-                        <a:t>#2-2·3</a:t>
-                      </a:r>
-                      <a:endParaRPr lang="ko-KR" sz="900">
-                        <a:latin typeface="+mn-lt"/>
-                        <a:ea typeface="LG스마트체 Regular" panose="020B0600000101010101" pitchFamily="50" charset="-127"/>
-                        <a:cs typeface="Arial Narrow"/>
-                      </a:endParaRPr>
-                    </a:p>
-                  </a:txBody>
-                  <a:tcPr marL="6273" marR="6273" marT="6273" marB="0" anchor="ctr">
-                    <a:lnL w="12700" cap="flat" cmpd="sng" algn="ctr">
-                      <a:solidFill>
-                        <a:schemeClr val="bg1">
-                          <a:lumMod val="50000"/>
-                        </a:schemeClr>
-                      </a:solidFill>
-                      <a:prstDash val="solid"/>
-                      <a:round/>
-                      <a:headEnd type="none" w="med" len="med"/>
-                      <a:tailEnd type="none" w="med" len="med"/>
-                    </a:lnL>
-                    <a:lnR w="12700" cap="flat" cmpd="sng" algn="ctr">
-                      <a:solidFill>
-                        <a:schemeClr val="bg1">
-                          <a:lumMod val="50000"/>
-                        </a:schemeClr>
-                      </a:solidFill>
-                      <a:prstDash val="solid"/>
-                      <a:round/>
-                      <a:headEnd type="none" w="med" len="med"/>
-                      <a:tailEnd type="none" w="med" len="med"/>
-                    </a:lnR>
-                    <a:lnT w="12700" cap="flat" cmpd="sng" algn="ctr">
-                      <a:solidFill>
-                        <a:schemeClr val="tx1"/>
-                      </a:solidFill>
-                      <a:prstDash val="solid"/>
-                      <a:round/>
-                      <a:headEnd type="none" w="med" len="med"/>
-                      <a:tailEnd type="none" w="med" len="med"/>
-                    </a:lnT>
-                    <a:lnB w="12700" cap="flat" cmpd="sng" algn="ctr">
-                      <a:solidFill>
-                        <a:schemeClr val="tx1"/>
-                      </a:solidFill>
-                      <a:prstDash val="solid"/>
-                      <a:round/>
-                      <a:headEnd type="none" w="med" len="med"/>
-                      <a:tailEnd type="none" w="med" len="med"/>
-                    </a:lnB>
-                  </a:tcPr>
-                </a:tc>
-                <a:tc>
-                  <a:txBody>
-                    <a:bodyPr/>
-                    <a:lstStyle/>
-                    <a:p>
-                      <a:pPr marL="0" marR="0" lvl="0" indent="0" algn="l" rtl="0" eaLnBrk="1" fontAlgn="auto" latinLnBrk="1" hangingPunct="1">
-                        <a:lnSpc>
-                          <a:spcPct val="100000"/>
-                        </a:lnSpc>
-                        <a:spcBef>
-                          <a:spcPts val="0"/>
-                        </a:spcBef>
-                        <a:spcAft>
-                          <a:spcPts val="0"/>
-                        </a:spcAft>
-                        <a:buClrTx/>
-                        <a:buSzTx/>
-                        <a:buFontTx/>
-                        <a:buNone/>
-                      </a:pPr>
-                      <a:r>
-                        <a:rPr sz="900" b="0">
-                          <a:solidFill>
-                            <a:srgbClr val="0000FF"/>
-                          </a:solidFill>
-                          <a:latin typeface="Arial Narrow"/>
-                          <a:ea typeface="LG스마트체 Regular" panose="020B0600000101010101" pitchFamily="50" charset="-127"/>
-                          <a:cs typeface="Arial Narrow"/>
-                        </a:rPr>
-                        <a:t>금주(W40)에는 Normal Line 수평전개 완료, 2주 데이터로 개선 유지 확인</a:t>
-                      </a:r>
-                      <a:endParaRPr lang="ko-KR" sz="900" dirty="0">
-                        <a:latin typeface="+mn-lt"/>
-                        <a:ea typeface="LG스마트체 Regular" panose="020B0600000101010101" pitchFamily="50" charset="-127"/>
-                        <a:cs typeface="Arial Narrow"/>
-                      </a:endParaRPr>
-                    </a:p>
-                  </a:txBody>
-                  <a:tcPr marL="36000" marR="6273" marT="36000" marB="36000">
-                    <a:lnL w="12700" cap="flat" cmpd="sng" algn="ctr">
-                      <a:solidFill>
-                        <a:schemeClr val="bg1">
-                          <a:lumMod val="50000"/>
-                        </a:schemeClr>
-                      </a:solidFill>
-                      <a:prstDash val="solid"/>
-                      <a:round/>
-                      <a:headEnd type="none" w="med" len="med"/>
-                      <a:tailEnd type="none" w="med" len="med"/>
-                    </a:lnL>
-                    <a:lnR w="12700" cap="flat" cmpd="sng" algn="ctr">
-                      <a:solidFill>
-                        <a:schemeClr val="bg1">
-                          <a:lumMod val="50000"/>
-                        </a:schemeClr>
-                      </a:solidFill>
-                      <a:prstDash val="solid"/>
-                      <a:round/>
-                      <a:headEnd type="none" w="med" len="med"/>
-                      <a:tailEnd type="none" w="med" len="med"/>
-                    </a:lnR>
-                    <a:lnT w="12700" cap="flat" cmpd="sng" algn="ctr">
-                      <a:solidFill>
-                        <a:schemeClr val="tx1"/>
-                      </a:solidFill>
-                      <a:prstDash val="solid"/>
-                      <a:round/>
-                      <a:headEnd type="none" w="med" len="med"/>
-                      <a:tailEnd type="none" w="med" len="med"/>
-                    </a:lnT>
-                    <a:lnB w="12700" cap="flat" cmpd="sng" algn="ctr">
-                      <a:solidFill>
-                        <a:schemeClr val="tx1"/>
-                      </a:solidFill>
-                      <a:prstDash val="solid"/>
-                      <a:round/>
-                      <a:headEnd type="none" w="med" len="med"/>
-                      <a:tailEnd type="none" w="med" len="med"/>
-                    </a:lnB>
-                    <a:solidFill>
-                      <a:schemeClr val="bg1"/>
-                    </a:solidFill>
-                  </a:tcPr>
-                </a:tc>
-                <a:tc rowSpan="2">
-                  <a:txBody>
-                    <a:bodyPr/>
-                    <a:lstStyle/>
-                    <a:p>
-                      <a:pPr lvl="0" algn="ctr">
-                        <a:lnSpc>
-                          <a:spcPct val="100000"/>
-                        </a:lnSpc>
-                        <a:spcBef>
-                          <a:spcPts val="0"/>
-                        </a:spcBef>
-                        <a:spcAft>
-                          <a:spcPts val="0"/>
-                        </a:spcAft>
-                        <a:buNone/>
-                      </a:pPr>
-                      <a:r>
-                        <a:rPr sz="900" b="0">
-                          <a:solidFill>
-                            <a:srgbClr val="000000"/>
-                          </a:solidFill>
-                          <a:latin typeface="Arial Narrow"/>
-                          <a:ea typeface="LG스마트체 Regular" panose="020B0600000101010101" pitchFamily="50" charset="-127"/>
-                          <a:cs typeface="Arial Narrow"/>
-                        </a:rPr>
-                        <a:t>'26.09 /</a:t>
-                      </a:r>
-                      <a:endParaRPr lang="ko-KR" sz="900">
-                        <a:latin typeface="+mn-lt"/>
-                        <a:ea typeface="LG스마트체 Regular" panose="020B0600000101010101" pitchFamily="50" charset="-127"/>
-                        <a:cs typeface="Arial Narrow"/>
-                      </a:endParaRPr>
-                    </a:p>
-                    <a:p>
-                      <a:pPr lvl="0" algn="ctr">
-                        <a:lnSpc>
-                          <a:spcPct val="100000"/>
-                        </a:lnSpc>
-                        <a:spcBef>
-                          <a:spcPts val="0"/>
-                        </a:spcBef>
-                        <a:spcAft>
-                          <a:spcPts val="0"/>
-                        </a:spcAft>
-                        <a:buNone/>
-                      </a:pPr>
-                      <a:r>
-                        <a:rPr sz="900" b="0">
-                          <a:solidFill>
-                            <a:srgbClr val="0000FF"/>
-                          </a:solidFill>
-                          <a:latin typeface="Arial Narrow"/>
-                          <a:ea typeface="LG스마트체 Regular" panose="020B0600000101010101" pitchFamily="50" charset="-127"/>
-                          <a:cs typeface="Arial Narrow"/>
-                        </a:rPr>
-                        <a:t>(북미 10/13)</a:t>
-                      </a:r>
-                      <a:endParaRPr lang="ko-KR" sz="900">
-                        <a:latin typeface="+mn-lt"/>
-                        <a:ea typeface="LG스마트체 Regular" panose="020B0600000101010101" pitchFamily="50" charset="-127"/>
-                        <a:cs typeface="Arial Narrow"/>
-                      </a:endParaRPr>
-                    </a:p>
-                  </a:txBody>
-                  <a:tcPr marL="36000" marR="6273" marT="36000" marB="36000" anchor="ctr">
-                    <a:lnL w="12700" cap="flat" cmpd="sng" algn="ctr">
-                      <a:solidFill>
-                        <a:schemeClr val="bg1">
-                          <a:lumMod val="50000"/>
-                        </a:schemeClr>
-                      </a:solidFill>
-                      <a:prstDash val="solid"/>
-                      <a:round/>
-                      <a:headEnd type="none" w="med" len="med"/>
-                      <a:tailEnd type="none" w="med" len="med"/>
-                    </a:lnL>
-                    <a:lnR w="12700" cap="flat" cmpd="sng" algn="ctr">
-                      <a:solidFill>
-                        <a:schemeClr val="bg1">
-                          <a:lumMod val="50000"/>
-                        </a:schemeClr>
-                      </a:solidFill>
-                      <a:prstDash val="solid"/>
-                      <a:round/>
-                      <a:headEnd type="none" w="med" len="med"/>
-                      <a:tailEnd type="none" w="med" len="med"/>
-                    </a:lnR>
-                    <a:lnT w="12700" cap="flat" cmpd="sng" algn="ctr">
-                      <a:solidFill>
-                        <a:schemeClr val="tx1"/>
-                      </a:solidFill>
-                      <a:prstDash val="solid"/>
-                      <a:round/>
-                      <a:headEnd type="none" w="med" len="med"/>
-                      <a:tailEnd type="none" w="med" len="med"/>
-                    </a:lnT>
-                    <a:lnB w="12700" cap="flat" cmpd="sng" algn="ctr">
-                      <a:solidFill>
-                        <a:schemeClr val="tx1"/>
-                      </a:solidFill>
-                      <a:prstDash val="solid"/>
-                      <a:round/>
-                      <a:headEnd type="none" w="med" len="med"/>
-                      <a:tailEnd type="none" w="med" len="med"/>
-                    </a:lnB>
-                  </a:tcPr>
-                </a:tc>
-                <a:tc rowSpan="2">
-                  <a:txBody>
-                    <a:bodyPr/>
-                    <a:lstStyle/>
-                    <a:p>
-                      <a:pPr lvl="0" algn="ctr" defTabSz="914400">
-                        <a:lnSpc>
-                          <a:spcPct val="100000"/>
-                        </a:lnSpc>
-                        <a:spcBef>
-                          <a:spcPts val="0"/>
-                        </a:spcBef>
-                        <a:spcAft>
-                          <a:spcPts val="0"/>
-                        </a:spcAft>
-                        <a:buNone/>
-                        <a:tabLst/>
-                        <a:defRPr>
-                          <a:latin typeface="Arial Narrow"/>
-                          <a:ea typeface="LG Smart Regular"/>
-                          <a:cs typeface="Arial Narrow"/>
-                        </a:defRPr>
-                      </a:pPr>
-                      <a:r>
-                        <a:rPr sz="900" b="0">
-                          <a:solidFill>
-                            <a:srgbClr val="000000"/>
-                          </a:solidFill>
-                          <a:latin typeface="Arial Narrow"/>
-                          <a:ea typeface="LG스마트체 Regular" panose="020B0600000101010101" pitchFamily="50" charset="-127"/>
-                          <a:cs typeface="Arial Narrow"/>
-                        </a:rPr>
-                        <a:t>이제희</a:t>
-                      </a:r>
-                      <a:endParaRPr lang="ko-KR" sz="900">
-                        <a:latin typeface="+mn-lt"/>
-                        <a:ea typeface="LG스마트체 Regular" panose="020B0600000101010101" pitchFamily="50" charset="-127"/>
-                        <a:cs typeface="Arial Narrow"/>
-                      </a:endParaRPr>
-                    </a:p>
-                    <a:p>
-                      <a:pPr lvl="0" algn="ctr" defTabSz="914400">
-                        <a:lnSpc>
-                          <a:spcPct val="100000"/>
-                        </a:lnSpc>
-                        <a:spcBef>
-                          <a:spcPts val="0"/>
-                        </a:spcBef>
-                        <a:spcAft>
-                          <a:spcPts val="0"/>
-                        </a:spcAft>
-                        <a:buNone/>
-                        <a:tabLst/>
-                        <a:defRPr>
-                          <a:latin typeface="Arial Narrow"/>
-                          <a:ea typeface="LG Smart Regular"/>
-                          <a:cs typeface="Arial Narrow"/>
-                        </a:defRPr>
-                      </a:pPr>
-                      <a:r>
-                        <a:rPr sz="900" b="0">
-                          <a:solidFill>
-                            <a:srgbClr val="000000"/>
-                          </a:solidFill>
-                          <a:latin typeface="Arial Narrow"/>
-                          <a:ea typeface="LG스마트체 Regular" panose="020B0600000101010101" pitchFamily="50" charset="-127"/>
-                          <a:cs typeface="Arial Narrow"/>
-                        </a:rPr>
-                        <a:t>김형원</a:t>
-                      </a:r>
-                      <a:endParaRPr lang="ko-KR" sz="900">
-                        <a:latin typeface="+mn-lt"/>
-                        <a:ea typeface="LG스마트체 Regular" panose="020B0600000101010101" pitchFamily="50" charset="-127"/>
-                        <a:cs typeface="Arial Narrow"/>
-                      </a:endParaRPr>
-                    </a:p>
-                  </a:txBody>
-                  <a:tcPr marL="36000" marR="6273" marT="36000" marB="36000" anchor="ctr">
-                    <a:lnL w="12700" cap="flat" cmpd="sng" algn="ctr">
-                      <a:solidFill>
-                        <a:schemeClr val="bg1">
-                          <a:lumMod val="50000"/>
-                        </a:schemeClr>
-                      </a:solidFill>
-                      <a:prstDash val="solid"/>
-                      <a:round/>
-                      <a:headEnd type="none" w="med" len="med"/>
-                      <a:tailEnd type="none" w="med" len="med"/>
-                    </a:lnL>
-                    <a:lnR>
-                      <a:noFill/>
-                    </a:lnR>
-                    <a:lnT w="12700" cap="flat" cmpd="sng" algn="ctr">
-                      <a:solidFill>
-                        <a:schemeClr val="tx1"/>
-                      </a:solidFill>
-                      <a:prstDash val="solid"/>
-                      <a:round/>
-                      <a:headEnd type="none" w="med" len="med"/>
-                      <a:tailEnd type="none" w="med" len="med"/>
-                    </a:lnT>
-                    <a:lnB w="12700" cap="flat" cmpd="sng" algn="ctr">
-                      <a:solidFill>
-                        <a:schemeClr val="tx1"/>
-                      </a:solidFill>
-                      <a:prstDash val="solid"/>
-                      <a:round/>
-                      <a:headEnd type="none" w="med" len="med"/>
-                      <a:tailEnd type="none" w="med" len="med"/>
-                    </a:lnB>
-                  </a:tcPr>
-                </a:tc>
-                <a:extLst>
-                  <a:ext uri="{0D108BD9-81ED-4DB2-BD59-A6C34878D82A}">
-                    <a16:rowId xmlns:a16="http://schemas.microsoft.com/office/drawing/2014/main" val="10006"/>
-                  </a:ext>
-                </a:extLst>
-              </a:tr>
-              <a:tr h="5290246">
-                <a:tc vMerge="1">
-                  <a:txBody>
-                    <a:bodyPr/>
-                    <a:lstStyle/>
-                    <a:p>
-                      <a:pPr latinLnBrk="1"/>
-                      <a:endParaRPr lang="ko-KR" altLang="en-US">
-                        <a:latin typeface="Arial Narrow"/>
-                        <a:ea typeface="LG Smart Regular"/>
-                        <a:cs typeface="Arial Narrow"/>
-                      </a:endParaRPr>
-                    </a:p>
-                  </a:txBody>
-                  <a:tcPr/>
-                </a:tc>
-                <a:tc vMerge="1">
-                  <a:txBody>
-                    <a:bodyPr/>
-                    <a:lstStyle/>
-                    <a:p>
-                      <a:pPr latinLnBrk="1"/>
-                      <a:endParaRPr lang="ko-KR" altLang="en-US">
-                        <a:latin typeface="Arial Narrow"/>
-                        <a:ea typeface="LG Smart Regular"/>
-                        <a:cs typeface="Arial Narrow"/>
-                      </a:endParaRPr>
-                    </a:p>
-                  </a:txBody>
-                  <a:tcPr/>
-                </a:tc>
-                <a:tc>
-                  <a:txBody>
-                    <a:bodyPr/>
-                    <a:lstStyle/>
-                    <a:p>
-                      <a:pPr marL="0" marR="0" lvl="0" indent="0" algn="l" rtl="0" eaLnBrk="1" fontAlgn="auto" latinLnBrk="1" hangingPunct="1">
-                        <a:lnSpc>
-                          <a:spcPct val="100000"/>
-                        </a:lnSpc>
-                        <a:spcBef>
-                          <a:spcPts val="0"/>
-                        </a:spcBef>
-                        <a:spcAft>
-                          <a:spcPts val="0"/>
-                        </a:spcAft>
-                        <a:buClrTx/>
-                        <a:buSzTx/>
-                        <a:buFontTx/>
-                        <a:buNone/>
-                      </a:pPr>
-                      <a:endParaRPr lang="ko-KR" sz="900" dirty="0">
-                        <a:latin typeface="+mn-lt"/>
-                        <a:ea typeface="LG스마트체 Regular" panose="020B0600000101010101" pitchFamily="50" charset="-127"/>
-                        <a:cs typeface="Arial Narrow"/>
-                      </a:endParaRPr>
-                    </a:p>
-                  </a:txBody>
-                  <a:tcPr marL="36000" marR="6273" marT="36000" marB="36000">
-                    <a:lnL w="12700" cap="flat" cmpd="sng" algn="ctr">
-                      <a:solidFill>
-                        <a:schemeClr val="bg1">
-                          <a:lumMod val="50000"/>
-                        </a:schemeClr>
-                      </a:solidFill>
-                      <a:prstDash val="solid"/>
-                      <a:round/>
-                      <a:headEnd type="none" w="med" len="med"/>
-                      <a:tailEnd type="none" w="med" len="med"/>
-                    </a:lnL>
-                    <a:lnR w="12700" cap="flat" cmpd="sng" algn="ctr">
-                      <a:solidFill>
-                        <a:schemeClr val="bg1">
-                          <a:lumMod val="50000"/>
-                        </a:schemeClr>
-                      </a:solidFill>
-                      <a:prstDash val="solid"/>
-                      <a:round/>
-                      <a:headEnd type="none" w="med" len="med"/>
-                      <a:tailEnd type="none" w="med" len="med"/>
-                    </a:lnR>
-                    <a:lnT w="12700" cap="flat" cmpd="sng" algn="ctr">
-                      <a:solidFill>
-                        <a:schemeClr val="tx1"/>
-                      </a:solidFill>
-                      <a:prstDash val="solid"/>
-                      <a:round/>
-                      <a:headEnd type="none" w="med" len="med"/>
-                      <a:tailEnd type="none" w="med" len="med"/>
-                    </a:lnT>
-                    <a:lnB w="12700" cap="flat" cmpd="sng" algn="ctr">
-                      <a:solidFill>
-                        <a:schemeClr val="tx1"/>
-                      </a:solidFill>
-                      <a:prstDash val="solid"/>
-                      <a:round/>
-                      <a:headEnd type="none" w="med" len="med"/>
-                      <a:tailEnd type="none" w="med" len="med"/>
-                    </a:lnB>
-                    <a:solidFill>
-                      <a:schemeClr val="bg1"/>
-                    </a:solidFill>
-                  </a:tcPr>
-                </a:tc>
-                <a:tc vMerge="1">
-                  <a:txBody>
-                    <a:bodyPr/>
-                    <a:lstStyle/>
-                    <a:p>
-                      <a:pPr latinLnBrk="1"/>
-                      <a:endParaRPr lang="ko-KR" altLang="en-US">
-                        <a:latin typeface="Arial Narrow"/>
-                        <a:ea typeface="LG Smart Regular"/>
-                        <a:cs typeface="Arial Narrow"/>
-                      </a:endParaRPr>
-                    </a:p>
-                  </a:txBody>
-                  <a:tcPr/>
-                </a:tc>
-                <a:tc vMerge="1">
-                  <a:txBody>
-                    <a:bodyPr/>
-                    <a:lstStyle/>
-                    <a:p>
-                      <a:pPr latinLnBrk="1"/>
-                      <a:endParaRPr lang="ko-KR" altLang="en-US">
-                        <a:latin typeface="Arial Narrow"/>
-                        <a:ea typeface="LG Smart Regular"/>
-                        <a:cs typeface="Arial Narrow"/>
-                      </a:endParaRPr>
-                    </a:p>
-                  </a:txBody>
-                  <a:tcPr/>
-                </a:tc>
-                <a:extLst>
-                  <a:ext uri="{0D108BD9-81ED-4DB2-BD59-A6C34878D82A}">
-                    <a16:rowId xmlns:a16="http://schemas.microsoft.com/office/drawing/2014/main" val="4265497985"/>
-                  </a:ext>
-                </a:extLst>
-              </a:tr>
-            </a:tbl>
-          </a:graphicData>
-        </a:graphic>
-      </p:graphicFrame>
-      <p:sp>
-        <p:nvSpPr>
-          <p:cNvPr id="5" name="pjt_header">
-            <a:extLst>
-              <a:ext uri="{FF2B5EF4-FFF2-40B4-BE49-F238E27FC236}">
-                <a16:creationId xmlns:a16="http://schemas.microsoft.com/office/drawing/2014/main" id="{628CAE2A-DD4F-41F2-BEE4-46B7C086D483}"/>
-              </a:ext>
-            </a:extLst>
-          </p:cNvPr>
-          <p:cNvSpPr txBox="1">
-            <a:spLocks/>
-          </p:cNvSpPr>
-          <p:nvPr/>
-        </p:nvSpPr>
-        <p:spPr>
-          <a:xfrm>
-            <a:off x="108656" y="612730"/>
-            <a:ext cx="6858000" cy="215444"/>
-          </a:xfrm>
-          <a:prstGeom prst="rect">
-            <a:avLst/>
-          </a:prstGeom>
-        </p:spPr>
-        <p:txBody>
-          <a:bodyPr wrap="square" lIns="0" tIns="0" rIns="0" bIns="0" anchor="t">
-            <a:spAutoFit/>
-          </a:bodyPr>
-          <a:lstStyle>
-            <a:lvl1pPr marL="0" indent="0" algn="r" defTabSz="914400" rtl="0" eaLnBrk="1" latinLnBrk="1" hangingPunct="1">
-              <a:spcBef>
-                <a:spcPct val="20000"/>
-              </a:spcBef>
-              <a:buFontTx/>
-              <a:buNone/>
-              <a:defRPr sz="1200" kern="1200" baseline="0">
-                <a:solidFill>
-                  <a:schemeClr val="tx1"/>
-                </a:solidFill>
-                <a:latin typeface="Arial Narrow"/>
-                <a:ea typeface="LG Smart Regular"/>
-                <a:cs typeface="Arial Narrow"/>
-              </a:defRPr>
-            </a:lvl1pPr>
-            <a:lvl2pPr marL="742950" indent="-285750" algn="l" defTabSz="914400" rtl="0" eaLnBrk="1" latinLnBrk="1" hangingPunct="1">
-              <a:spcBef>
-                <a:spcPct val="20000"/>
-              </a:spcBef>
-              <a:buFont typeface="Arial" panose="020B0604020202020204" pitchFamily="34" charset="0"/>
-              <a:buChar char="–"/>
-              <a:defRPr sz="2800" kern="1200">
-                <a:solidFill>
-                  <a:schemeClr val="tx1"/>
-                </a:solidFill>
-                <a:latin typeface="Arial Narrow"/>
-                <a:ea typeface="LG Smart Regular"/>
-                <a:cs typeface="Arial Narrow"/>
-              </a:defRPr>
-            </a:lvl2pPr>
-            <a:lvl3pPr marL="1143000" indent="-228600" algn="l" defTabSz="914400" rtl="0" eaLnBrk="1" latinLnBrk="1" hangingPunct="1">
-              <a:spcBef>
-                <a:spcPct val="20000"/>
-              </a:spcBef>
-              <a:buFont typeface="Arial" panose="020B0604020202020204" pitchFamily="34" charset="0"/>
-              <a:buChar char="•"/>
-              <a:defRPr sz="2400" kern="1200">
-                <a:solidFill>
-                  <a:schemeClr val="tx1"/>
-                </a:solidFill>
-                <a:latin typeface="Arial Narrow"/>
-                <a:ea typeface="LG Smart Regular"/>
-                <a:cs typeface="Arial Narrow"/>
-              </a:defRPr>
-            </a:lvl3pPr>
-            <a:lvl4pPr marL="1600200" indent="-228600" algn="l" defTabSz="914400" rtl="0" eaLnBrk="1" latinLnBrk="1" hangingPunct="1">
-              <a:spcBef>
-                <a:spcPct val="20000"/>
-              </a:spcBef>
-              <a:buFont typeface="Arial" panose="020B0604020202020204" pitchFamily="34" charset="0"/>
-              <a:buChar char="–"/>
-              <a:defRPr sz="2000" kern="1200">
-                <a:solidFill>
-                  <a:schemeClr val="tx1"/>
-                </a:solidFill>
-                <a:latin typeface="Arial Narrow"/>
-                <a:ea typeface="LG Smart Regular"/>
-                <a:cs typeface="Arial Narrow"/>
-              </a:defRPr>
-            </a:lvl4pPr>
-            <a:lvl5pPr marL="2057400" indent="-228600" algn="l" defTabSz="914400" rtl="0" eaLnBrk="1" latinLnBrk="1" hangingPunct="1">
-              <a:spcBef>
-                <a:spcPct val="20000"/>
-              </a:spcBef>
-              <a:buFont typeface="Arial" panose="020B0604020202020204" pitchFamily="34" charset="0"/>
-              <a:buChar char="»"/>
-              <a:defRPr sz="2000" kern="1200">
-                <a:solidFill>
-                  <a:schemeClr val="tx1"/>
-                </a:solidFill>
-                <a:latin typeface="Arial Narrow"/>
-                <a:ea typeface="LG Smart Regular"/>
-                <a:cs typeface="Arial Narrow"/>
-              </a:defRPr>
-            </a:lvl5pPr>
-            <a:lvl6pPr marL="2514600" indent="-228600" algn="l" defTabSz="914400" rtl="0" eaLnBrk="1" latinLnBrk="1" hangingPunct="1">
-              <a:spcBef>
-                <a:spcPct val="20000"/>
-              </a:spcBef>
-              <a:buFont typeface="Arial" panose="020B0604020202020204" pitchFamily="34" charset="0"/>
-              <a:buChar char="•"/>
-              <a:defRPr sz="2000" kern="1200">
-                <a:solidFill>
-                  <a:schemeClr val="tx1"/>
-                </a:solidFill>
-                <a:latin typeface="Arial Narrow"/>
-                <a:ea typeface="LG Smart Regular"/>
-                <a:cs typeface="Arial Narrow"/>
-              </a:defRPr>
-            </a:lvl6pPr>
-            <a:lvl7pPr marL="2971800" indent="-228600" algn="l" defTabSz="914400" rtl="0" eaLnBrk="1" latinLnBrk="1" hangingPunct="1">
-              <a:spcBef>
-                <a:spcPct val="20000"/>
-              </a:spcBef>
-              <a:buFont typeface="Arial" panose="020B0604020202020204" pitchFamily="34" charset="0"/>
-              <a:buChar char="•"/>
-              <a:defRPr sz="2000" kern="1200">
-                <a:solidFill>
-                  <a:schemeClr val="tx1"/>
-                </a:solidFill>
-                <a:latin typeface="Arial Narrow"/>
-                <a:ea typeface="LG Smart Regular"/>
-                <a:cs typeface="Arial Narrow"/>
-              </a:defRPr>
-            </a:lvl7pPr>
-            <a:lvl8pPr marL="3429000" indent="-228600" algn="l" defTabSz="914400" rtl="0" eaLnBrk="1" latinLnBrk="1" hangingPunct="1">
-              <a:spcBef>
-                <a:spcPct val="20000"/>
-              </a:spcBef>
-              <a:buFont typeface="Arial" panose="020B0604020202020204" pitchFamily="34" charset="0"/>
-              <a:buChar char="•"/>
-              <a:defRPr sz="2000" kern="1200">
-                <a:solidFill>
-                  <a:schemeClr val="tx1"/>
-                </a:solidFill>
-                <a:latin typeface="Arial Narrow"/>
-                <a:ea typeface="LG Smart Regular"/>
-                <a:cs typeface="Arial Narrow"/>
-              </a:defRPr>
-            </a:lvl8pPr>
-            <a:lvl9pPr marL="3886200" indent="-228600" algn="l" defTabSz="914400" rtl="0" eaLnBrk="1" latinLnBrk="1" hangingPunct="1">
-              <a:spcBef>
-                <a:spcPct val="20000"/>
-              </a:spcBef>
-              <a:buFont typeface="Arial" panose="020B0604020202020204" pitchFamily="34" charset="0"/>
-              <a:buChar char="•"/>
-              <a:defRPr sz="2000" kern="1200">
-                <a:solidFill>
-                  <a:schemeClr val="tx1"/>
-                </a:solidFill>
-                <a:latin typeface="Arial Narrow"/>
-                <a:ea typeface="LG Smart Regular"/>
-                <a:cs typeface="Arial Narrow"/>
-              </a:defRPr>
-            </a:lvl9pPr>
-          </a:lstStyle>
-          <a:p>
-            <a:pPr marL="0" marR="0" lvl="0" indent="0" algn="l" defTabSz="914400" rtl="0" eaLnBrk="1" fontAlgn="auto" latinLnBrk="1" hangingPunct="1">
-              <a:lnSpc>
-                <a:spcPct val="100000"/>
-              </a:lnSpc>
-              <a:spcBef>
-                <a:spcPts val="0"/>
-              </a:spcBef>
-              <a:spcAft>
-                <a:spcPts val="0"/>
-              </a:spcAft>
-              <a:buClrTx/>
-              <a:buSzTx/>
-              <a:buFontTx/>
-              <a:buNone/>
-              <a:tabLst/>
-              <a:defRPr>
-                <a:latin typeface="Arial Narrow"/>
-                <a:ea typeface="LG Smart Regular"/>
-                <a:cs typeface="Arial Narrow"/>
-              </a:defRPr>
-            </a:pPr>
-            <a:r>
-              <a:rPr sz="1400" b="0">
-                <a:solidFill>
-                  <a:srgbClr val="000000"/>
-                </a:solidFill>
-                <a:latin typeface="Arial Narrow"/>
-                <a:ea typeface="LG스마트체 Regular" panose="020B0600000101010101" pitchFamily="50" charset="-127"/>
-              </a:rPr>
-              <a:t>■ ESWA 재료교체 불량 개선 (계속)</a:t>
-            </a:r>
-            <a:endParaRPr lang="ko-KR" sz="1400">
-              <a:latin typeface="+mn-lt"/>
-              <a:ea typeface="LG스마트체 Regular" panose="020B0600000101010101" pitchFamily="50" charset="-127"/>
-            </a:endParaRPr>
-          </a:p>
-        </p:txBody>
-      </p:sp>
-      <p:sp>
-        <p:nvSpPr>
-          <p:cNvPr id="64" name="slide_title"/>
-          <p:cNvSpPr txBox="1">
-            <a:spLocks/>
-          </p:cNvSpPr>
-          <p:nvPr/>
-        </p:nvSpPr>
-        <p:spPr>
-          <a:xfrm>
-            <a:off x="124961" y="132021"/>
-            <a:ext cx="4406976" cy="369332"/>
-          </a:xfrm>
-          <a:prstGeom prst="rect">
-            <a:avLst/>
-          </a:prstGeom>
-          <a:solidFill>
-            <a:srgbClr val="FFFFFF"/>
-          </a:solidFill>
-          <a:ln w="12700">
-            <a:gradFill>
-              <a:gsLst>
-                <a:gs pos="0">
-                  <a:srgbClr val="FFFFFF">
-                    <a:alpha val="0"/>
-                    <a:lumMod val="0"/>
-                    <a:lumOff val="100000"/>
-                  </a:srgbClr>
-                </a:gs>
-                <a:gs pos="98000">
-                  <a:srgbClr val="FFFFFF">
-                    <a:alpha val="0"/>
-                    <a:lumMod val="0"/>
-                    <a:lumOff val="100000"/>
-                  </a:srgbClr>
-                </a:gs>
-                <a:gs pos="99000">
-                  <a:srgbClr val="000000"/>
-                </a:gs>
-              </a:gsLst>
-              <a:lin ang="5400000" scaled="0"/>
-            </a:gradFill>
-            <a:miter lim="800000"/>
-            <a:headEnd/>
-            <a:tailEnd/>
-          </a:ln>
-        </p:spPr>
-        <p:txBody>
-          <a:bodyPr vert="horz" wrap="none" lIns="91440" tIns="45720" rIns="91440" bIns="45720" numCol="1" anchor="ctr" anchorCtr="0" compatLnSpc="1">
-            <a:prstTxWarp prst="textNoShape">
-              <a:avLst/>
-            </a:prstTxWarp>
-            <a:spAutoFit/>
-          </a:bodyPr>
-          <a:lstStyle>
-            <a:defPPr>
-              <a:defRPr lang="ko-KR">
-                <a:latin typeface="Arial Narrow"/>
-                <a:ea typeface="LG Smart Regular"/>
-                <a:cs typeface="Arial Narrow"/>
-              </a:defRPr>
-            </a:defPPr>
-            <a:lvl1pPr lvl="0" fontAlgn="base" latinLnBrk="0">
-              <a:spcBef>
-                <a:spcPct val="10000"/>
-              </a:spcBef>
-              <a:spcAft>
-                <a:spcPct val="0"/>
-              </a:spcAft>
-              <a:buNone/>
-              <a:defRPr kumimoji="1" sz="2000" b="1" kern="0">
-                <a:solidFill>
-                  <a:prstClr val="black"/>
-                </a:solidFill>
-                <a:latin typeface="Arial Narrow"/>
-                <a:ea typeface="LG Smart Regular"/>
-                <a:cs typeface="Arial Narrow"/>
-              </a:defRPr>
-            </a:lvl1pPr>
-          </a:lstStyle>
-          <a:p>
-            <a:pPr marL="0" marR="0" lvl="0" indent="0" algn="l" defTabSz="914400" rtl="0" eaLnBrk="1" fontAlgn="base" latinLnBrk="0" hangingPunct="1">
-              <a:lnSpc>
-                <a:spcPct val="100000"/>
-              </a:lnSpc>
-              <a:spcBef>
-                <a:spcPts val="0"/>
-              </a:spcBef>
-              <a:spcAft>
-                <a:spcPts val="0"/>
-              </a:spcAft>
-              <a:buClrTx/>
-              <a:buSzTx/>
-              <a:buFontTx/>
-              <a:buNone/>
-              <a:tabLst/>
-              <a:defRPr>
-                <a:latin typeface="Arial Narrow"/>
-                <a:ea typeface="LG Smart Regular"/>
-                <a:cs typeface="Arial Narrow"/>
-              </a:defRPr>
-            </a:pPr>
-            <a:r>
-              <a:rPr sz="1800" b="0">
-                <a:solidFill>
-                  <a:srgbClr val="000000"/>
-                </a:solidFill>
-                <a:latin typeface="Arial Narrow"/>
-                <a:ea typeface="LG스마트체 Regular" panose="020B0600000101010101" pitchFamily="50" charset="-127"/>
-              </a:rPr>
-              <a:t>1. 과제 진행 현황_조립자동보정팀</a:t>
-            </a:r>
-            <a:endParaRPr lang="ko-KR" sz="1800">
-              <a:latin typeface="+mn-lt"/>
-              <a:ea typeface="LG스마트체 Regular" panose="020B0600000101010101" pitchFamily="50" charset="-127"/>
-            </a:endParaRPr>
-          </a:p>
-        </p:txBody>
-      </p:sp>
-      <p:sp>
-        <p:nvSpPr>
-          <p:cNvPr id="7" name="updated_at">
-            <a:extLst>
-              <a:ext uri="{FF2B5EF4-FFF2-40B4-BE49-F238E27FC236}">
-                <a16:creationId xmlns:a16="http://schemas.microsoft.com/office/drawing/2014/main" id="{2849E3CD-BC1D-4B95-8A4F-2BD9E660BDE3}"/>
-              </a:ext>
-            </a:extLst>
-          </p:cNvPr>
-          <p:cNvSpPr txBox="1"/>
-          <p:nvPr/>
-        </p:nvSpPr>
-        <p:spPr>
-          <a:xfrm>
-            <a:off x="8355374" y="572550"/>
-            <a:ext cx="1413849" cy="169277"/>
-          </a:xfrm>
-          <a:prstGeom prst="rect">
-            <a:avLst/>
-          </a:prstGeom>
-        </p:spPr>
-        <p:txBody>
-          <a:bodyPr wrap="none" lIns="0" tIns="0" rIns="0" bIns="0" anchor="t">
-            <a:spAutoFit/>
-          </a:bodyPr>
-          <a:lstStyle>
-            <a:defPPr>
-              <a:defRPr lang="ko-KR">
-                <a:latin typeface="Arial Narrow"/>
-                <a:ea typeface="LG Smart Regular"/>
-                <a:cs typeface="Arial Narrow"/>
-              </a:defRPr>
-            </a:defPPr>
-            <a:lvl1pPr lvl="0" indent="0" algn="r">
-              <a:spcBef>
-                <a:spcPts val="0"/>
-              </a:spcBef>
-              <a:buFontTx/>
-              <a:buNone/>
-              <a:defRPr sz="1100" baseline="0">
-                <a:solidFill>
-                  <a:prstClr val="black"/>
-                </a:solidFill>
-                <a:latin typeface="Arial Narrow"/>
-                <a:ea typeface="LG Smart Regular"/>
-                <a:cs typeface="Arial Narrow"/>
-              </a:defRPr>
-            </a:lvl1pPr>
-            <a:lvl2pPr marL="742950" indent="-285750">
-              <a:spcBef>
-                <a:spcPct val="20000"/>
-              </a:spcBef>
-              <a:buFont typeface="Arial" panose="020B0604020202020204" pitchFamily="34" charset="0"/>
-              <a:buChar char="–"/>
-              <a:defRPr sz="2800">
-                <a:latin typeface="Arial Narrow"/>
-                <a:ea typeface="LG Smart Regular"/>
-                <a:cs typeface="Arial Narrow"/>
-              </a:defRPr>
-            </a:lvl2pPr>
-            <a:lvl3pPr marL="1143000" indent="-228600">
-              <a:spcBef>
-                <a:spcPct val="20000"/>
-              </a:spcBef>
-              <a:buFont typeface="Arial" panose="020B0604020202020204" pitchFamily="34" charset="0"/>
-              <a:buChar char="•"/>
-              <a:defRPr sz="2400">
-                <a:latin typeface="Arial Narrow"/>
-                <a:ea typeface="LG Smart Regular"/>
-                <a:cs typeface="Arial Narrow"/>
-              </a:defRPr>
-            </a:lvl3pPr>
-            <a:lvl4pPr marL="1600200" indent="-228600">
-              <a:spcBef>
-                <a:spcPct val="20000"/>
-              </a:spcBef>
-              <a:buFont typeface="Arial" panose="020B0604020202020204" pitchFamily="34" charset="0"/>
-              <a:buChar char="–"/>
-              <a:defRPr sz="2000">
-                <a:latin typeface="Arial Narrow"/>
-                <a:ea typeface="LG Smart Regular"/>
-                <a:cs typeface="Arial Narrow"/>
-              </a:defRPr>
-            </a:lvl4pPr>
-            <a:lvl5pPr marL="2057400" indent="-228600">
-              <a:spcBef>
-                <a:spcPct val="20000"/>
-              </a:spcBef>
-              <a:buFont typeface="Arial" panose="020B0604020202020204" pitchFamily="34" charset="0"/>
-              <a:buChar char="»"/>
-              <a:defRPr sz="2000">
-                <a:latin typeface="Arial Narrow"/>
-                <a:ea typeface="LG Smart Regular"/>
-                <a:cs typeface="Arial Narrow"/>
-              </a:defRPr>
-            </a:lvl5pPr>
-            <a:lvl6pPr marL="2514600" indent="-228600">
-              <a:spcBef>
-                <a:spcPct val="20000"/>
-              </a:spcBef>
-              <a:buFont typeface="Arial" panose="020B0604020202020204" pitchFamily="34" charset="0"/>
-              <a:buChar char="•"/>
-              <a:defRPr sz="2000">
-                <a:latin typeface="Arial Narrow"/>
-                <a:ea typeface="LG Smart Regular"/>
-                <a:cs typeface="Arial Narrow"/>
-              </a:defRPr>
-            </a:lvl6pPr>
-            <a:lvl7pPr marL="2971800" indent="-228600">
-              <a:spcBef>
-                <a:spcPct val="20000"/>
-              </a:spcBef>
-              <a:buFont typeface="Arial" panose="020B0604020202020204" pitchFamily="34" charset="0"/>
-              <a:buChar char="•"/>
-              <a:defRPr sz="2000">
-                <a:latin typeface="Arial Narrow"/>
-                <a:ea typeface="LG Smart Regular"/>
-                <a:cs typeface="Arial Narrow"/>
-              </a:defRPr>
-            </a:lvl7pPr>
-            <a:lvl8pPr marL="3429000" indent="-228600">
-              <a:spcBef>
-                <a:spcPct val="20000"/>
-              </a:spcBef>
-              <a:buFont typeface="Arial" panose="020B0604020202020204" pitchFamily="34" charset="0"/>
-              <a:buChar char="•"/>
-              <a:defRPr sz="2000">
-                <a:latin typeface="Arial Narrow"/>
-                <a:ea typeface="LG Smart Regular"/>
-                <a:cs typeface="Arial Narrow"/>
-              </a:defRPr>
-            </a:lvl8pPr>
-            <a:lvl9pPr marL="3886200" indent="-228600">
-              <a:spcBef>
-                <a:spcPct val="20000"/>
-              </a:spcBef>
-              <a:buFont typeface="Arial" panose="020B0604020202020204" pitchFamily="34" charset="0"/>
-              <a:buChar char="•"/>
-              <a:defRPr sz="2000">
-                <a:latin typeface="Arial Narrow"/>
-                <a:ea typeface="LG Smart Regular"/>
-                <a:cs typeface="Arial Narrow"/>
-              </a:defRPr>
-            </a:lvl9pPr>
-          </a:lstStyle>
-          <a:p>
-            <a:pPr marL="0" marR="0" lvl="0" indent="0" algn="r" defTabSz="914400" rtl="0" eaLnBrk="1" fontAlgn="auto" latinLnBrk="1" hangingPunct="1">
-              <a:lnSpc>
-                <a:spcPct val="100000"/>
-              </a:lnSpc>
-              <a:spcBef>
-                <a:spcPts val="0"/>
-              </a:spcBef>
-              <a:spcAft>
-                <a:spcPts val="0"/>
-              </a:spcAft>
-              <a:buClrTx/>
-              <a:buSzTx/>
-              <a:buFontTx/>
-              <a:buNone/>
-              <a:tabLst/>
-              <a:defRPr>
-                <a:latin typeface="Arial Narrow"/>
-                <a:ea typeface="LG Smart Regular"/>
-                <a:cs typeface="Arial Narrow"/>
-              </a:defRPr>
-            </a:pPr>
-            <a:r>
-              <a:rPr sz="1100" b="0">
-                <a:solidFill>
-                  <a:srgbClr val="000000"/>
-                </a:solidFill>
-                <a:latin typeface="Arial Narrow"/>
-                <a:ea typeface="LG스마트체 Regular" panose="020B0600000101010101" pitchFamily="50" charset="-127"/>
-              </a:rPr>
-              <a:t>업데이트 시간 : 10/3 21시</a:t>
-            </a:r>
-            <a:endParaRPr lang="ko-KR" sz="1100">
-              <a:latin typeface="+mn-lt"/>
-              <a:ea typeface="LG스마트체 Regular" panose="020B0600000101010101" pitchFamily="50" charset="-127"/>
-            </a:endParaRPr>
-          </a:p>
-        </p:txBody>
-      </p:sp>
-      <p:sp>
-        <p:nvSpPr>
-          <p:cNvPr id="8" name="author">
-            <a:extLst>
-              <a:ext uri="{FF2B5EF4-FFF2-40B4-BE49-F238E27FC236}">
-                <a16:creationId xmlns:a16="http://schemas.microsoft.com/office/drawing/2014/main" id="{7178FAE9-DDAC-36A6-95D7-1CCF93D6F62A}"/>
-              </a:ext>
-            </a:extLst>
-          </p:cNvPr>
-          <p:cNvSpPr txBox="1">
-            <a:spLocks/>
-          </p:cNvSpPr>
-          <p:nvPr/>
-        </p:nvSpPr>
-        <p:spPr>
-          <a:xfrm>
-            <a:off x="8756721" y="403273"/>
-            <a:ext cx="1024318" cy="169277"/>
-          </a:xfrm>
-          <a:prstGeom prst="rect">
-            <a:avLst/>
-          </a:prstGeom>
-        </p:spPr>
-        <p:txBody>
-          <a:bodyPr wrap="none" lIns="0" tIns="0" rIns="0" bIns="0" anchor="t">
-            <a:spAutoFit/>
-          </a:bodyPr>
-          <a:lstStyle>
-            <a:lvl1pPr marL="0" indent="0" algn="r" defTabSz="914400" rtl="0" eaLnBrk="1" latinLnBrk="1" hangingPunct="1">
-              <a:spcBef>
-                <a:spcPct val="20000"/>
-              </a:spcBef>
-              <a:buFontTx/>
-              <a:buNone/>
-              <a:defRPr sz="1200" kern="1200" baseline="0">
-                <a:solidFill>
-                  <a:schemeClr val="tx1"/>
-                </a:solidFill>
-                <a:latin typeface="Arial Narrow"/>
-                <a:ea typeface="LG Smart Regular"/>
-                <a:cs typeface="Arial Narrow"/>
-              </a:defRPr>
-            </a:lvl1pPr>
-            <a:lvl2pPr marL="742950" indent="-285750" algn="l" defTabSz="914400" rtl="0" eaLnBrk="1" latinLnBrk="1" hangingPunct="1">
-              <a:spcBef>
-                <a:spcPct val="20000"/>
-              </a:spcBef>
-              <a:buFont typeface="Arial" panose="020B0604020202020204" pitchFamily="34" charset="0"/>
-              <a:buChar char="–"/>
-              <a:defRPr sz="2800" kern="1200">
-                <a:solidFill>
-                  <a:schemeClr val="tx1"/>
-                </a:solidFill>
-                <a:latin typeface="Arial Narrow"/>
-                <a:ea typeface="LG Smart Regular"/>
-                <a:cs typeface="Arial Narrow"/>
-              </a:defRPr>
-            </a:lvl2pPr>
-            <a:lvl3pPr marL="1143000" indent="-228600" algn="l" defTabSz="914400" rtl="0" eaLnBrk="1" latinLnBrk="1" hangingPunct="1">
-              <a:spcBef>
-                <a:spcPct val="20000"/>
-              </a:spcBef>
-              <a:buFont typeface="Arial" panose="020B0604020202020204" pitchFamily="34" charset="0"/>
-              <a:buChar char="•"/>
-              <a:defRPr sz="2400" kern="1200">
-                <a:solidFill>
-                  <a:schemeClr val="tx1"/>
-                </a:solidFill>
-                <a:latin typeface="Arial Narrow"/>
-                <a:ea typeface="LG Smart Regular"/>
-                <a:cs typeface="Arial Narrow"/>
-              </a:defRPr>
-            </a:lvl3pPr>
-            <a:lvl4pPr marL="1600200" indent="-228600" algn="l" defTabSz="914400" rtl="0" eaLnBrk="1" latinLnBrk="1" hangingPunct="1">
-              <a:spcBef>
-                <a:spcPct val="20000"/>
-              </a:spcBef>
-              <a:buFont typeface="Arial" panose="020B0604020202020204" pitchFamily="34" charset="0"/>
-              <a:buChar char="–"/>
-              <a:defRPr sz="2000" kern="1200">
-                <a:solidFill>
-                  <a:schemeClr val="tx1"/>
-                </a:solidFill>
-                <a:latin typeface="Arial Narrow"/>
-                <a:ea typeface="LG Smart Regular"/>
-                <a:cs typeface="Arial Narrow"/>
-              </a:defRPr>
-            </a:lvl4pPr>
-            <a:lvl5pPr marL="2057400" indent="-228600" algn="l" defTabSz="914400" rtl="0" eaLnBrk="1" latinLnBrk="1" hangingPunct="1">
-              <a:spcBef>
-                <a:spcPct val="20000"/>
-              </a:spcBef>
-              <a:buFont typeface="Arial" panose="020B0604020202020204" pitchFamily="34" charset="0"/>
-              <a:buChar char="»"/>
-              <a:defRPr sz="2000" kern="1200">
-                <a:solidFill>
-                  <a:schemeClr val="tx1"/>
-                </a:solidFill>
-                <a:latin typeface="Arial Narrow"/>
-                <a:ea typeface="LG Smart Regular"/>
-                <a:cs typeface="Arial Narrow"/>
-              </a:defRPr>
-            </a:lvl5pPr>
-            <a:lvl6pPr marL="2514600" indent="-228600" algn="l" defTabSz="914400" rtl="0" eaLnBrk="1" latinLnBrk="1" hangingPunct="1">
-              <a:spcBef>
-                <a:spcPct val="20000"/>
-              </a:spcBef>
-              <a:buFont typeface="Arial" panose="020B0604020202020204" pitchFamily="34" charset="0"/>
-              <a:buChar char="•"/>
-              <a:defRPr sz="2000" kern="1200">
-                <a:solidFill>
-                  <a:schemeClr val="tx1"/>
-                </a:solidFill>
-                <a:latin typeface="Arial Narrow"/>
-                <a:ea typeface="LG Smart Regular"/>
-                <a:cs typeface="Arial Narrow"/>
-              </a:defRPr>
-            </a:lvl6pPr>
-            <a:lvl7pPr marL="2971800" indent="-228600" algn="l" defTabSz="914400" rtl="0" eaLnBrk="1" latinLnBrk="1" hangingPunct="1">
-              <a:spcBef>
-                <a:spcPct val="20000"/>
-              </a:spcBef>
-              <a:buFont typeface="Arial" panose="020B0604020202020204" pitchFamily="34" charset="0"/>
-              <a:buChar char="•"/>
-              <a:defRPr sz="2000" kern="1200">
-                <a:solidFill>
-                  <a:schemeClr val="tx1"/>
-                </a:solidFill>
-                <a:latin typeface="Arial Narrow"/>
-                <a:ea typeface="LG Smart Regular"/>
-                <a:cs typeface="Arial Narrow"/>
-              </a:defRPr>
-            </a:lvl7pPr>
-            <a:lvl8pPr marL="3429000" indent="-228600" algn="l" defTabSz="914400" rtl="0" eaLnBrk="1" latinLnBrk="1" hangingPunct="1">
-              <a:spcBef>
-                <a:spcPct val="20000"/>
-              </a:spcBef>
-              <a:buFont typeface="Arial" panose="020B0604020202020204" pitchFamily="34" charset="0"/>
-              <a:buChar char="•"/>
-              <a:defRPr sz="2000" kern="1200">
-                <a:solidFill>
-                  <a:schemeClr val="tx1"/>
-                </a:solidFill>
-                <a:latin typeface="Arial Narrow"/>
-                <a:ea typeface="LG Smart Regular"/>
-                <a:cs typeface="Arial Narrow"/>
-              </a:defRPr>
-            </a:lvl8pPr>
-            <a:lvl9pPr marL="3886200" indent="-228600" algn="l" defTabSz="914400" rtl="0" eaLnBrk="1" latinLnBrk="1" hangingPunct="1">
-              <a:spcBef>
-                <a:spcPct val="20000"/>
-              </a:spcBef>
-              <a:buFont typeface="Arial" panose="020B0604020202020204" pitchFamily="34" charset="0"/>
-              <a:buChar char="•"/>
-              <a:defRPr sz="2000" kern="1200">
-                <a:solidFill>
-                  <a:schemeClr val="tx1"/>
-                </a:solidFill>
-                <a:latin typeface="Arial Narrow"/>
-                <a:ea typeface="LG Smart Regular"/>
-                <a:cs typeface="Arial Narrow"/>
-              </a:defRPr>
-            </a:lvl9pPr>
-          </a:lstStyle>
-          <a:p>
-            <a:pPr marL="0" marR="0" lvl="0" indent="0" algn="r" defTabSz="914400" rtl="0" eaLnBrk="1" fontAlgn="auto" latinLnBrk="1" hangingPunct="1">
-              <a:lnSpc>
-                <a:spcPct val="100000"/>
-              </a:lnSpc>
-              <a:spcBef>
-                <a:spcPts val="0"/>
-              </a:spcBef>
-              <a:spcAft>
-                <a:spcPts val="0"/>
-              </a:spcAft>
-              <a:buClrTx/>
-              <a:buSzTx/>
-              <a:buFontTx/>
-              <a:buNone/>
-              <a:tabLst/>
-              <a:defRPr>
-                <a:latin typeface="Arial Narrow"/>
-                <a:ea typeface="LG Smart Regular"/>
-                <a:cs typeface="Arial Narrow"/>
-              </a:defRPr>
-            </a:pPr>
-            <a:r>
-              <a:rPr sz="1100" b="0">
-                <a:solidFill>
-                  <a:srgbClr val="000000"/>
-                </a:solidFill>
-                <a:latin typeface="Arial Narrow"/>
-                <a:ea typeface="LG스마트체 Regular" panose="020B0600000101010101" pitchFamily="50" charset="-127"/>
-              </a:rPr>
-              <a:t>작성자 : 이제희 P</a:t>
-            </a:r>
-            <a:endParaRPr lang="ko-KR" sz="1100">
-              <a:latin typeface="+mn-lt"/>
-              <a:ea typeface="LG스마트체 Regular" panose="020B0600000101010101" pitchFamily="50" charset="-127"/>
-            </a:endParaRPr>
-          </a:p>
-        </p:txBody>
-      </p:sp>
-      <p:sp>
-        <p:nvSpPr>
-          <p:cNvPr id="65" name="body_top"/>
-          <p:cNvSpPr txBox="1"/>
-          <p:nvPr/>
-        </p:nvSpPr>
-        <p:spPr>
-          <a:xfrm>
-            <a:off x="1670334" y="1284290"/>
-            <a:ext cx="6970747" cy="137160"/>
-          </a:xfrm>
-          <a:prstGeom prst="rect">
-            <a:avLst/>
-          </a:prstGeom>
-          <a:noFill/>
-        </p:spPr>
-        <p:txBody>
-          <a:bodyPr wrap="square" lIns="18288" tIns="0" rIns="18288" bIns="0">
-            <a:spAutoFit/>
-          </a:bodyPr>
-          <a:lstStyle/>
-          <a:p>
-            <a:pPr>
-              <a:lnSpc>
-                <a:spcPct val="100000"/>
-              </a:lnSpc>
-              <a:spcBef>
-                <a:spcPts val="0"/>
-              </a:spcBef>
-              <a:spcAft>
-                <a:spcPts val="0"/>
-              </a:spcAft>
-            </a:pPr>
-            <a:endParaRPr lang="ko-KR" sz="900" dirty="0">
-              <a:ea typeface="LG스마트체 Regular" panose="020B0600000101010101" pitchFamily="50" charset="-127"/>
-              <a:cs typeface="Arial Narrow"/>
-            </a:endParaRPr>
-          </a:p>
-        </p:txBody>
-      </p:sp>
-      <p:sp>
-        <p:nvSpPr>
-          <p:cNvPr id="67" name="body_main"/>
-          <p:cNvSpPr txBox="1"/>
-          <p:nvPr/>
-        </p:nvSpPr>
-        <p:spPr>
-          <a:xfrm>
-            <a:off x="1670334" y="1284290"/>
-            <a:ext cx="6970747" cy="5217094"/>
-          </a:xfrm>
-          <a:prstGeom prst="rect">
-            <a:avLst/>
-          </a:prstGeom>
-          <a:noFill/>
-        </p:spPr>
-        <p:txBody>
-          <a:bodyPr wrap="square" lIns="18288" tIns="0" rIns="18288" bIns="0">
-            <a:spAutoFit/>
-          </a:bodyPr>
-          <a:lstStyle/>
-          <a:p>
-            <a:pPr>
-              <a:lnSpc>
-                <a:spcPct val="100000"/>
-              </a:lnSpc>
-              <a:spcBef>
-                <a:spcPts val="0"/>
-              </a:spcBef>
-              <a:spcAft>
-                <a:spcPts val="0"/>
-              </a:spcAft>
-            </a:pPr>
-            <a:r>
-              <a:rPr sz="900" b="1">
-                <a:solidFill>
-                  <a:srgbClr val="000000"/>
-                </a:solidFill>
-                <a:latin typeface="Arial Narrow"/>
-                <a:ea typeface="LG스마트체 Regular" panose="020B0600000101010101" pitchFamily="50" charset="-127"/>
-                <a:cs typeface="Arial Narrow"/>
-              </a:rPr>
-              <a:t>[향후 계획 (계속)]</a:t>
-            </a:r>
-            <a:endParaRPr lang="ko-KR" sz="900" dirty="0">
-              <a:ea typeface="LG스마트체 Regular" panose="020B0600000101010101" pitchFamily="50" charset="-127"/>
-              <a:cs typeface="Arial Narrow"/>
-            </a:endParaRPr>
-          </a:p>
           <a:p>
             <a:pPr>
               <a:lnSpc>
@@ -12096,6 +10082,11 @@
         </p:txBody>
       </p:sp>
     </p:spTree>
+    <p:extLst>
+      <p:ext uri="{BB962C8B-B14F-4D97-AF65-F5344CB8AC3E}">
+        <p14:creationId xmlns:p14="http://schemas.microsoft.com/office/powerpoint/2010/main" val="4080837860"/>
+      </p:ext>
+    </p:extLst>
   </p:cSld>
   <p:clrMapOvr>
     <a:masterClrMapping/>

--- a/weekly-report/demo/w40/out/output/P-ASM-001_2026-W40.pptx
+++ b/weekly-report/demo/w40/out/output/P-ASM-001_2026-W40.pptx
@@ -3941,7 +3941,7 @@
                           <a:ea typeface="LG스마트체 Regular" panose="020B0600000101010101" pitchFamily="50" charset="-127"/>
                           <a:cs typeface="Arial Narrow"/>
                         </a:rPr>
-                        <a:t>금주(W40)에는 Normal Line 수평전개 완료, 2주 데이터로 개선 유지 확인</a:t>
+                        <a:t>금주(W40)에는 Normal Line 수평전개를 완료했고, 2주 데이터로 개선 효과 유지를 확인했습니다</a:t>
                       </a:r>
                       <a:endParaRPr lang="ko-KR" sz="900" dirty="0">
                         <a:latin typeface="+mn-lt"/>
@@ -4863,7 +4863,7 @@
                 <a:latin typeface="Arial Narrow"/>
                 <a:ea typeface="LG스마트체 Regular" panose="020B0600000101010101" pitchFamily="50" charset="-127"/>
               </a:rPr>
-              <a:t>업데이트 시간 : 10/3 21시</a:t>
+              <a:t>업데이트 시간 : 10/4 9시</a:t>
             </a:r>
             <a:endParaRPr lang="ko-KR" sz="1100">
               <a:latin typeface="+mn-lt"/>
@@ -9573,7 +9573,7 @@
                 <a:ea typeface="LG스마트체 Regular" panose="020B0600000101010101" pitchFamily="50" charset="-127"/>
                 <a:cs typeface="Arial Narrow"/>
               </a:rPr>
-              <a:t>- 1차 로직(8/13) 적용: E77 0.189% → 0.164%, 18대 중 12대 감소</a:t>
+              <a:t>- 8/13 1차 로직을 적용해 E77 불량률이 0.189% → 0.164%로, 18대 중 12대가 감소했습니다</a:t>
             </a:r>
             <a:endParaRPr lang="ko-KR" sz="900" dirty="0">
               <a:ea typeface="LG스마트체 Regular" panose="020B0600000101010101" pitchFamily="50" charset="-127"/>
@@ -9601,7 +9601,7 @@
                 <a:ea typeface="LG스마트체 Regular" panose="020B0600000101010101" pitchFamily="50" charset="-127"/>
                 <a:cs typeface="Arial Narrow"/>
               </a:rPr>
-              <a:t>- 2차 로직(9/4~): Limit ±0.35mm, 대표 4대 0.270% → 0.185%</a:t>
+              <a:t>- 9/4부터 2차 로직(Limit ±0.35mm)을 적용해 대표 4대 불량률이 0.270% → 0.185%로 감소했습니다</a:t>
             </a:r>
             <a:endParaRPr lang="ko-KR" sz="900" dirty="0">
               <a:ea typeface="LG스마트체 Regular" panose="020B0600000101010101" pitchFamily="50" charset="-127"/>
@@ -9629,7 +9629,7 @@
                 <a:ea typeface="LG스마트체 Regular" panose="020B0600000101010101" pitchFamily="50" charset="-127"/>
                 <a:cs typeface="Arial Narrow"/>
               </a:rPr>
-              <a:t>- 수평전개 완료: MEB·ESMI1 #2-2·3(9/16), Normal Line(9/30), 누적 26대</a:t>
+              <a:t>- 수평전개는 MEB·ESMI1 #2-2·3(9/16), Normal Line(9/30)까지 완료해 누적 26대입니다</a:t>
             </a:r>
             <a:endParaRPr lang="ko-KR" sz="900" dirty="0">
               <a:ea typeface="LG스마트체 Regular" panose="020B0600000101010101" pitchFamily="50" charset="-127"/>
@@ -9657,7 +9657,7 @@
                 <a:ea typeface="LG스마트체 Regular" panose="020B0600000101010101" pitchFamily="50" charset="-127"/>
                 <a:cs typeface="Arial Narrow"/>
               </a:rPr>
-              <a:t>- ESWA 0.171% → 0.144%(4일) → 0.139%(2주), ESMI1 0.367% → 0.221%</a:t>
+              <a:t>- ESWA는 0.171% → 0.144%(4일) → 0.139%(2주), ESMI1은 0.367% → 0.221%로 개선했습니다</a:t>
             </a:r>
             <a:endParaRPr lang="ko-KR" sz="900" dirty="0">
               <a:ea typeface="LG스마트체 Regular" panose="020B0600000101010101" pitchFamily="50" charset="-127"/>
@@ -9730,7 +9730,7 @@
                 <a:ea typeface="LG스마트체 Regular" panose="020B0600000101010101" pitchFamily="50" charset="-127"/>
                 <a:cs typeface="Arial Narrow"/>
               </a:rPr>
-              <a:t>- ESWA MEB E77 0.171% → 0.139% (2주 평균, 4일 0.144% 대비 추가 감소)</a:t>
+              <a:t>- ESWA MEB E77 불량률은 2주 평균 0.171% → 0.139%로, 4일 결과(0.144%)보다 더 감소했습니다</a:t>
             </a:r>
             <a:endParaRPr lang="ko-KR" sz="900" dirty="0">
               <a:ea typeface="LG스마트체 Regular" panose="020B0600000101010101" pitchFamily="50" charset="-127"/>
@@ -9758,7 +9758,7 @@
                 <a:ea typeface="LG스마트체 Regular" panose="020B0600000101010101" pitchFamily="50" charset="-127"/>
                 <a:cs typeface="Arial Narrow"/>
               </a:rPr>
-              <a:t>- ESMI1 #2-2·3 0.367% → 0.221% (2주 평균)</a:t>
+              <a:t>- ESMI1 #2-2·3 불량률도 2주 평균 0.367% → 0.221%로 감소해 단기 효과가 유지되고 있습니다</a:t>
             </a:r>
             <a:endParaRPr lang="ko-KR" sz="900" dirty="0">
               <a:ea typeface="LG스마트체 Regular" panose="020B0600000101010101" pitchFamily="50" charset="-127"/>
@@ -9786,7 +9786,7 @@
                 <a:ea typeface="LG스마트체 Regular" panose="020B0600000101010101" pitchFamily="50" charset="-127"/>
                 <a:cs typeface="Arial Narrow"/>
               </a:rPr>
-              <a:t>- Normal Line 수평전개 완료(9/30): WA 4대(#21~#24), MI_HL 2대</a:t>
+              <a:t>- Normal Line 수평전개를 WA 4대(#21~#24), MI_HL 2대 적용으로 9/30 완료했습니다</a:t>
             </a:r>
             <a:endParaRPr lang="ko-KR" sz="900" dirty="0">
               <a:ea typeface="LG스마트체 Regular" panose="020B0600000101010101" pitchFamily="50" charset="-127"/>
@@ -9814,7 +9814,7 @@
                 <a:ea typeface="LG스마트체 Regular" panose="020B0600000101010101" pitchFamily="50" charset="-127"/>
                 <a:cs typeface="Arial Narrow"/>
               </a:rPr>
-              <a:t>- 수평전개 누적 적용 호기 26대</a:t>
+              <a:t>- WA 4대는 적용 후 첫날 알람이 없었으며, 수평전개 누적 적용 호기는 26대입니다</a:t>
             </a:r>
             <a:endParaRPr lang="ko-KR" sz="900" dirty="0">
               <a:ea typeface="LG스마트체 Regular" panose="020B0600000101010101" pitchFamily="50" charset="-127"/>
@@ -9842,7 +9842,7 @@
                 <a:ea typeface="LG스마트체 Regular" panose="020B0600000101010101" pitchFamily="50" charset="-127"/>
                 <a:cs typeface="Arial Narrow"/>
               </a:rPr>
-              <a:t>- 북미 Site 수평전개 일정 10월초 → 10/13 확정 (현지 라인 가동 일정)</a:t>
+              <a:t>- 북미 Site 수평전개 일정을 현지 라인 가동 일정에 맞춰 10월초 → 10/13으로 확정했습니다</a:t>
             </a:r>
             <a:endParaRPr lang="ko-KR" sz="900" dirty="0">
               <a:ea typeface="LG스마트체 Regular" panose="020B0600000101010101" pitchFamily="50" charset="-127"/>
@@ -9915,7 +9915,7 @@
                 <a:ea typeface="LG스마트체 Regular" panose="020B0600000101010101" pitchFamily="50" charset="-127"/>
                 <a:cs typeface="Arial Narrow"/>
               </a:rPr>
-              <a:t>- 북미 Site 수평전개 적용 (10/13)</a:t>
+              <a:t>- 북미 Site 수평전개를 10/13 적용하고, 적용 전 현지 PLC 보정 파라미터를 검증할 예정입니다</a:t>
             </a:r>
             <a:endParaRPr lang="ko-KR" sz="900" dirty="0">
               <a:ea typeface="LG스마트체 Regular" panose="020B0600000101010101" pitchFamily="50" charset="-127"/>
@@ -9943,7 +9943,7 @@
                 <a:ea typeface="LG스마트체 Regular" panose="020B0600000101010101" pitchFamily="50" charset="-127"/>
                 <a:cs typeface="Arial Narrow"/>
               </a:rPr>
-              <a:t>- 최종 효과 산출(~10/16) 및 완료 회고 작성</a:t>
+              <a:t>- 그룹장 보고용 최종 효과를 10/16까지 산출하고, 완료 회고 초안을 작성 중입니다</a:t>
             </a:r>
             <a:endParaRPr lang="ko-KR" sz="900" dirty="0">
               <a:ea typeface="LG스마트체 Regular" panose="020B0600000101010101" pitchFamily="50" charset="-127"/>
@@ -9971,7 +9971,7 @@
                 <a:ea typeface="LG스마트체 Regular" panose="020B0600000101010101" pitchFamily="50" charset="-127"/>
                 <a:cs typeface="Arial Narrow"/>
               </a:rPr>
-              <a:t>- 효과 유지 여부 한두 주 추가 모니터링</a:t>
+              <a:t>- 단기 개선 효과가 유지되는지 한두 주 추가로 불량률을 모니터링할 예정입니다</a:t>
             </a:r>
             <a:endParaRPr lang="ko-KR" sz="900" dirty="0">
               <a:ea typeface="LG스마트체 Regular" panose="020B0600000101010101" pitchFamily="50" charset="-127"/>
@@ -10044,7 +10044,7 @@
                 <a:ea typeface="LG스마트체 Regular" panose="020B0600000101010101" pitchFamily="50" charset="-127"/>
                 <a:cs typeface="Arial Narrow"/>
               </a:rPr>
-              <a:t>- 북미 PLC 펌웨어 버전 상이 → 보정 파라미터 이식 전 검증 필요</a:t>
+              <a:t>- 북미 현지 PLC 펌웨어 버전이 달라 보정 파라미터 이식 전 검증이 필요합니다</a:t>
             </a:r>
             <a:endParaRPr lang="ko-KR" sz="900" dirty="0">
               <a:ea typeface="LG스마트체 Regular" panose="020B0600000101010101" pitchFamily="50" charset="-127"/>
@@ -10072,7 +10072,7 @@
                 <a:ea typeface="LG스마트체 Regular" panose="020B0600000101010101" pitchFamily="50" charset="-127"/>
                 <a:cs typeface="Arial Narrow"/>
               </a:rPr>
-              <a:t>- 원격 접속 지원 여부 IT팀 확인 요청 필요 (지원 요청)</a:t>
+              <a:t>- 검증을 위한 북미 원격 접속 지원 가능 여부를 IT팀에 확인 요청드립니다 (지원 요청)</a:t>
             </a:r>
             <a:endParaRPr lang="ko-KR" sz="900" dirty="0">
               <a:ea typeface="LG스마트체 Regular" panose="020B0600000101010101" pitchFamily="50" charset="-127"/>

--- a/weekly-report/demo/w40/out/output/P-ASM-001_2026-W40.pptx
+++ b/weekly-report/demo/w40/out/output/P-ASM-001_2026-W40.pptx
@@ -3941,7 +3941,7 @@
                           <a:ea typeface="LG스마트체 Regular" panose="020B0600000101010101" pitchFamily="50" charset="-127"/>
                           <a:cs typeface="Arial Narrow"/>
                         </a:rPr>
-                        <a:t>금주(W40)에는 Normal Line 수평전개를 완료했고, 2주 데이터로 개선 효과 유지를 확인했습니다</a:t>
+                        <a:t>금주(W40)에는 Normal Line 수평전개를 완료했고, 추석 이후 2주 데이터로 개선 효과 유지를 확인했습니다</a:t>
                       </a:r>
                       <a:endParaRPr lang="ko-KR" sz="900" dirty="0">
                         <a:latin typeface="+mn-lt"/>
@@ -4863,7 +4863,7 @@
                 <a:latin typeface="Arial Narrow"/>
                 <a:ea typeface="LG스마트체 Regular" panose="020B0600000101010101" pitchFamily="50" charset="-127"/>
               </a:rPr>
-              <a:t>업데이트 시간 : 10/4 9시</a:t>
+              <a:t>업데이트 시간 : 10/4 10시</a:t>
             </a:r>
             <a:endParaRPr lang="ko-KR" sz="1100">
               <a:latin typeface="+mn-lt"/>
@@ -9573,7 +9573,7 @@
                 <a:ea typeface="LG스마트체 Regular" panose="020B0600000101010101" pitchFamily="50" charset="-127"/>
                 <a:cs typeface="Arial Narrow"/>
               </a:rPr>
-              <a:t>- 8/13 1차 로직을 적용해 E77 불량률이 0.189% → 0.164%로, 18대 중 12대가 감소했습니다</a:t>
+              <a:t>- 1차 로직(EPC 보정량·이음매 예측 보정 개선)을 적용해 E77 불량률이 0.189% → 0.164%로 감소했습니다. (08/13)</a:t>
             </a:r>
             <a:endParaRPr lang="ko-KR" sz="900" dirty="0">
               <a:ea typeface="LG스마트체 Regular" panose="020B0600000101010101" pitchFamily="50" charset="-127"/>
@@ -9601,7 +9601,7 @@
                 <a:ea typeface="LG스마트체 Regular" panose="020B0600000101010101" pitchFamily="50" charset="-127"/>
                 <a:cs typeface="Arial Narrow"/>
               </a:rPr>
-              <a:t>- 9/4부터 2차 로직(Limit ±0.35mm)을 적용해 대표 4대 불량률이 0.270% → 0.185%로 감소했습니다</a:t>
+              <a:t>- 2차 로직(Limit ±0.35mm)을 적용해 대표 4대 불량률이 0.270% → 0.185%로 감소했습니다. (09/04~)</a:t>
             </a:r>
             <a:endParaRPr lang="ko-KR" sz="900" dirty="0">
               <a:ea typeface="LG스마트체 Regular" panose="020B0600000101010101" pitchFamily="50" charset="-127"/>
@@ -9629,7 +9629,7 @@
                 <a:ea typeface="LG스마트체 Regular" panose="020B0600000101010101" pitchFamily="50" charset="-127"/>
                 <a:cs typeface="Arial Narrow"/>
               </a:rPr>
-              <a:t>- 수평전개는 MEB·ESMI1 #2-2·3(9/16), Normal Line(9/30)까지 완료해 누적 26대입니다</a:t>
+              <a:t>- 수평전개를 MEB·ESMI1 #2-2·3(9/16), Normal Line(9/30) 순으로 완료해 누적 26대입니다. (09/16~09/30)</a:t>
             </a:r>
             <a:endParaRPr lang="ko-KR" sz="900" dirty="0">
               <a:ea typeface="LG스마트체 Regular" panose="020B0600000101010101" pitchFamily="50" charset="-127"/>
@@ -9657,7 +9657,7 @@
                 <a:ea typeface="LG스마트체 Regular" panose="020B0600000101010101" pitchFamily="50" charset="-127"/>
                 <a:cs typeface="Arial Narrow"/>
               </a:rPr>
-              <a:t>- ESWA는 0.171% → 0.144%(4일) → 0.139%(2주), ESMI1은 0.367% → 0.221%로 개선했습니다</a:t>
+              <a:t>- ESWA 0.171% → 0.144%(4일) → 0.139%(2주), ESMI1 0.367% → 0.221%로 효과가 유지됐습니다. (09/22~09/28)</a:t>
             </a:r>
             <a:endParaRPr lang="ko-KR" sz="900" dirty="0">
               <a:ea typeface="LG스마트체 Regular" panose="020B0600000101010101" pitchFamily="50" charset="-127"/>
@@ -9730,7 +9730,7 @@
                 <a:ea typeface="LG스마트체 Regular" panose="020B0600000101010101" pitchFamily="50" charset="-127"/>
                 <a:cs typeface="Arial Narrow"/>
               </a:rPr>
-              <a:t>- ESWA MEB E77 불량률은 2주 평균 0.171% → 0.139%로, 4일 결과(0.144%)보다 더 감소했습니다</a:t>
+              <a:t>- 추석 이후 2주 데이터 기준 ESWA MEB E77 불량률이 0.171% → 0.139%로, 4일 결과(0.144%)보다 더 감소했습니다. (09/28)</a:t>
             </a:r>
             <a:endParaRPr lang="ko-KR" sz="900" dirty="0">
               <a:ea typeface="LG스마트체 Regular" panose="020B0600000101010101" pitchFamily="50" charset="-127"/>
@@ -9758,7 +9758,7 @@
                 <a:ea typeface="LG스마트체 Regular" panose="020B0600000101010101" pitchFamily="50" charset="-127"/>
                 <a:cs typeface="Arial Narrow"/>
               </a:rPr>
-              <a:t>- ESMI1 #2-2·3 불량률도 2주 평균 0.367% → 0.221%로 감소해 단기 효과가 유지되고 있습니다</a:t>
+              <a:t>- ESMI1 #2-2·3 불량률도 2주 평균 0.367% → 0.221%로 감소해 단기 개선 효과가 유지되고 있습니다. (09/28)</a:t>
             </a:r>
             <a:endParaRPr lang="ko-KR" sz="900" dirty="0">
               <a:ea typeface="LG스마트체 Regular" panose="020B0600000101010101" pitchFamily="50" charset="-127"/>
@@ -9786,7 +9786,7 @@
                 <a:ea typeface="LG스마트체 Regular" panose="020B0600000101010101" pitchFamily="50" charset="-127"/>
                 <a:cs typeface="Arial Narrow"/>
               </a:rPr>
-              <a:t>- Normal Line 수평전개를 WA 4대(#21~#24), MI_HL 2대 적용으로 9/30 완료했습니다</a:t>
+              <a:t>- Normal Line 수평전개는 WA 4대(#21~#24) 적용 후 MI_HL 2대까지 적용해 전체 완료했습니다. (09/29~09/30)</a:t>
             </a:r>
             <a:endParaRPr lang="ko-KR" sz="900" dirty="0">
               <a:ea typeface="LG스마트체 Regular" panose="020B0600000101010101" pitchFamily="50" charset="-127"/>
@@ -9814,7 +9814,7 @@
                 <a:ea typeface="LG스마트체 Regular" panose="020B0600000101010101" pitchFamily="50" charset="-127"/>
                 <a:cs typeface="Arial Narrow"/>
               </a:rPr>
-              <a:t>- WA 4대는 적용 후 첫날 알람이 없었으며, 수평전개 누적 적용 호기는 26대입니다</a:t>
+              <a:t>- WA 4대는 적용 후 첫날 알람이 없었으며, 수평전개 누적 적용 호기는 26대가 되었습니다. (09/29~09/30)</a:t>
             </a:r>
             <a:endParaRPr lang="ko-KR" sz="900" dirty="0">
               <a:ea typeface="LG스마트체 Regular" panose="020B0600000101010101" pitchFamily="50" charset="-127"/>
@@ -9842,7 +9842,7 @@
                 <a:ea typeface="LG스마트체 Regular" panose="020B0600000101010101" pitchFamily="50" charset="-127"/>
                 <a:cs typeface="Arial Narrow"/>
               </a:rPr>
-              <a:t>- 북미 Site 수평전개 일정을 현지 라인 가동 일정에 맞춰 10월초 → 10/13으로 확정했습니다</a:t>
+              <a:t>- 북미 법인과 협의해 현지 라인 가동 일정에 맞춰 북미 수평전개 일정을 10월초 → 10/13으로 확정했습니다. (10/01)</a:t>
             </a:r>
             <a:endParaRPr lang="ko-KR" sz="900" dirty="0">
               <a:ea typeface="LG스마트체 Regular" panose="020B0600000101010101" pitchFamily="50" charset="-127"/>
@@ -9915,7 +9915,7 @@
                 <a:ea typeface="LG스마트체 Regular" panose="020B0600000101010101" pitchFamily="50" charset="-127"/>
                 <a:cs typeface="Arial Narrow"/>
               </a:rPr>
-              <a:t>- 북미 Site 수평전개를 10/13 적용하고, 적용 전 현지 PLC 보정 파라미터를 검증할 예정입니다</a:t>
+              <a:t>- 북미 Site 수평전개를 적용하고, 적용 전 현지 PLC 보정 파라미터 이식을 검증할 예정입니다. (~10/13)</a:t>
             </a:r>
             <a:endParaRPr lang="ko-KR" sz="900" dirty="0">
               <a:ea typeface="LG스마트체 Regular" panose="020B0600000101010101" pitchFamily="50" charset="-127"/>
@@ -9943,7 +9943,7 @@
                 <a:ea typeface="LG스마트체 Regular" panose="020B0600000101010101" pitchFamily="50" charset="-127"/>
                 <a:cs typeface="Arial Narrow"/>
               </a:rPr>
-              <a:t>- 그룹장 보고용 최종 효과를 10/16까지 산출하고, 완료 회고 초안을 작성 중입니다</a:t>
+              <a:t>- 그룹장 보고용 최종 효과를 산출하고, 시작한 완료 회고 초안을 함께 마무리할 예정입니다. (~10/16)</a:t>
             </a:r>
             <a:endParaRPr lang="ko-KR" sz="900" dirty="0">
               <a:ea typeface="LG스마트체 Regular" panose="020B0600000101010101" pitchFamily="50" charset="-127"/>
@@ -9971,7 +9971,7 @@
                 <a:ea typeface="LG스마트체 Regular" panose="020B0600000101010101" pitchFamily="50" charset="-127"/>
                 <a:cs typeface="Arial Narrow"/>
               </a:rPr>
-              <a:t>- 단기 개선 효과가 유지되는지 한두 주 추가로 불량률을 모니터링할 예정입니다</a:t>
+              <a:t>- 단기 개선 효과가 계속 유지되는지 한두 주 추가로 재료교체 불량률을 모니터링할 예정입니다</a:t>
             </a:r>
             <a:endParaRPr lang="ko-KR" sz="900" dirty="0">
               <a:ea typeface="LG스마트체 Regular" panose="020B0600000101010101" pitchFamily="50" charset="-127"/>
@@ -10044,7 +10044,7 @@
                 <a:ea typeface="LG스마트체 Regular" panose="020B0600000101010101" pitchFamily="50" charset="-127"/>
                 <a:cs typeface="Arial Narrow"/>
               </a:rPr>
-              <a:t>- 북미 현지 PLC 펌웨어 버전이 달라 보정 파라미터 이식 전 검증이 필요합니다</a:t>
+              <a:t>- 북미 현지 PLC 펌웨어 버전이 국내와 달라 보정 파라미터 이식 전에 별도 검증이 필요합니다. (10/01)</a:t>
             </a:r>
             <a:endParaRPr lang="ko-KR" sz="900" dirty="0">
               <a:ea typeface="LG스마트체 Regular" panose="020B0600000101010101" pitchFamily="50" charset="-127"/>
@@ -10072,7 +10072,7 @@
                 <a:ea typeface="LG스마트체 Regular" panose="020B0600000101010101" pitchFamily="50" charset="-127"/>
                 <a:cs typeface="Arial Narrow"/>
               </a:rPr>
-              <a:t>- 검증을 위한 북미 원격 접속 지원 가능 여부를 IT팀에 확인 요청드립니다 (지원 요청)</a:t>
+              <a:t>- 북미 PLC 검증을 위한 원격 접속 지원 가능 여부를 IT팀에 확인 요청드립니다 (지원 요청). (10/01)</a:t>
             </a:r>
             <a:endParaRPr lang="ko-KR" sz="900" dirty="0">
               <a:ea typeface="LG스마트체 Regular" panose="020B0600000101010101" pitchFamily="50" charset="-127"/>

--- a/weekly-report/demo/w40/out/output/P-ASM-001_2026-W40.pptx
+++ b/weekly-report/demo/w40/out/output/P-ASM-001_2026-W40.pptx
@@ -4863,7 +4863,7 @@
                 <a:latin typeface="Arial Narrow"/>
                 <a:ea typeface="LG스마트체 Regular" panose="020B0600000101010101" pitchFamily="50" charset="-127"/>
               </a:rPr>
-              <a:t>업데이트 시간 : 10/4 10시</a:t>
+              <a:t>업데이트 시간 : 10/4 15시</a:t>
             </a:r>
             <a:endParaRPr lang="ko-KR" sz="1100">
               <a:latin typeface="+mn-lt"/>
